--- a/19/3 Power Bi/Power Bi.pptx
+++ b/19/3 Power Bi/Power Bi.pptx
@@ -5,7 +5,7 @@
     <p:sldMasterId id="2147483660" r:id="rId1"/>
   </p:sldMasterIdLst>
   <p:notesMasterIdLst>
-    <p:notesMasterId r:id="rId35"/>
+    <p:notesMasterId r:id="rId34"/>
   </p:notesMasterIdLst>
   <p:sldIdLst>
     <p:sldId id="256" r:id="rId2"/>
@@ -36,11 +36,10 @@
     <p:sldId id="288" r:id="rId27"/>
     <p:sldId id="289" r:id="rId28"/>
     <p:sldId id="290" r:id="rId29"/>
-    <p:sldId id="282" r:id="rId30"/>
-    <p:sldId id="270" r:id="rId31"/>
-    <p:sldId id="271" r:id="rId32"/>
-    <p:sldId id="272" r:id="rId33"/>
-    <p:sldId id="273" r:id="rId34"/>
+    <p:sldId id="270" r:id="rId30"/>
+    <p:sldId id="271" r:id="rId31"/>
+    <p:sldId id="272" r:id="rId32"/>
+    <p:sldId id="273" r:id="rId33"/>
   </p:sldIdLst>
   <p:sldSz cx="12192000" cy="6858000"/>
   <p:notesSz cx="6858000" cy="9144000"/>
@@ -229,7 +228,7 @@
           <a:p>
             <a:fld id="{B17773B0-9C71-4C42-839B-CED3341CD232}" type="datetimeFigureOut">
               <a:rPr lang="en-IN" smtClean="0"/>
-              <a:t>03-06-2026</a:t>
+              <a:t>04-06-2026</a:t>
             </a:fld>
             <a:endParaRPr lang="en-IN"/>
           </a:p>
@@ -767,7 +766,7 @@
           <a:p>
             <a:fld id="{DC8321A5-74C1-4574-A6AA-F1EDDDF12D9F}" type="datetimeFigureOut">
               <a:rPr lang="en-IN" smtClean="0"/>
-              <a:t>03-06-2026</a:t>
+              <a:t>04-06-2026</a:t>
             </a:fld>
             <a:endParaRPr lang="en-IN"/>
           </a:p>
@@ -1042,7 +1041,7 @@
           <a:p>
             <a:fld id="{DC8321A5-74C1-4574-A6AA-F1EDDDF12D9F}" type="datetimeFigureOut">
               <a:rPr lang="en-IN" smtClean="0"/>
-              <a:t>03-06-2026</a:t>
+              <a:t>04-06-2026</a:t>
             </a:fld>
             <a:endParaRPr lang="en-IN"/>
           </a:p>
@@ -1236,7 +1235,7 @@
           <a:p>
             <a:fld id="{DC8321A5-74C1-4574-A6AA-F1EDDDF12D9F}" type="datetimeFigureOut">
               <a:rPr lang="en-IN" smtClean="0"/>
-              <a:t>03-06-2026</a:t>
+              <a:t>04-06-2026</a:t>
             </a:fld>
             <a:endParaRPr lang="en-IN"/>
           </a:p>
@@ -1509,7 +1508,7 @@
           <a:p>
             <a:fld id="{DC8321A5-74C1-4574-A6AA-F1EDDDF12D9F}" type="datetimeFigureOut">
               <a:rPr lang="en-IN" smtClean="0"/>
-              <a:t>03-06-2026</a:t>
+              <a:t>04-06-2026</a:t>
             </a:fld>
             <a:endParaRPr lang="en-IN"/>
           </a:p>
@@ -1850,7 +1849,7 @@
           <a:p>
             <a:fld id="{DC8321A5-74C1-4574-A6AA-F1EDDDF12D9F}" type="datetimeFigureOut">
               <a:rPr lang="en-IN" smtClean="0"/>
-              <a:t>03-06-2026</a:t>
+              <a:t>04-06-2026</a:t>
             </a:fld>
             <a:endParaRPr lang="en-IN"/>
           </a:p>
@@ -2473,7 +2472,7 @@
           <a:p>
             <a:fld id="{DC8321A5-74C1-4574-A6AA-F1EDDDF12D9F}" type="datetimeFigureOut">
               <a:rPr lang="en-IN" smtClean="0"/>
-              <a:t>03-06-2026</a:t>
+              <a:t>04-06-2026</a:t>
             </a:fld>
             <a:endParaRPr lang="en-IN"/>
           </a:p>
@@ -3333,7 +3332,7 @@
           <a:p>
             <a:fld id="{DC8321A5-74C1-4574-A6AA-F1EDDDF12D9F}" type="datetimeFigureOut">
               <a:rPr lang="en-IN" smtClean="0"/>
-              <a:t>03-06-2026</a:t>
+              <a:t>04-06-2026</a:t>
             </a:fld>
             <a:endParaRPr lang="en-IN"/>
           </a:p>
@@ -3503,7 +3502,7 @@
           <a:p>
             <a:fld id="{DC8321A5-74C1-4574-A6AA-F1EDDDF12D9F}" type="datetimeFigureOut">
               <a:rPr lang="en-IN" smtClean="0"/>
-              <a:t>03-06-2026</a:t>
+              <a:t>04-06-2026</a:t>
             </a:fld>
             <a:endParaRPr lang="en-IN"/>
           </a:p>
@@ -3683,7 +3682,7 @@
           <a:p>
             <a:fld id="{DC8321A5-74C1-4574-A6AA-F1EDDDF12D9F}" type="datetimeFigureOut">
               <a:rPr lang="en-IN" smtClean="0"/>
-              <a:t>03-06-2026</a:t>
+              <a:t>04-06-2026</a:t>
             </a:fld>
             <a:endParaRPr lang="en-IN"/>
           </a:p>
@@ -3853,7 +3852,7 @@
           <a:p>
             <a:fld id="{DC8321A5-74C1-4574-A6AA-F1EDDDF12D9F}" type="datetimeFigureOut">
               <a:rPr lang="en-IN" smtClean="0"/>
-              <a:t>03-06-2026</a:t>
+              <a:t>04-06-2026</a:t>
             </a:fld>
             <a:endParaRPr lang="en-IN"/>
           </a:p>
@@ -4100,7 +4099,7 @@
           <a:p>
             <a:fld id="{DC8321A5-74C1-4574-A6AA-F1EDDDF12D9F}" type="datetimeFigureOut">
               <a:rPr lang="en-IN" smtClean="0"/>
-              <a:t>03-06-2026</a:t>
+              <a:t>04-06-2026</a:t>
             </a:fld>
             <a:endParaRPr lang="en-IN"/>
           </a:p>
@@ -4392,7 +4391,7 @@
           <a:p>
             <a:fld id="{DC8321A5-74C1-4574-A6AA-F1EDDDF12D9F}" type="datetimeFigureOut">
               <a:rPr lang="en-IN" smtClean="0"/>
-              <a:t>03-06-2026</a:t>
+              <a:t>04-06-2026</a:t>
             </a:fld>
             <a:endParaRPr lang="en-IN"/>
           </a:p>
@@ -4836,7 +4835,7 @@
           <a:p>
             <a:fld id="{DC8321A5-74C1-4574-A6AA-F1EDDDF12D9F}" type="datetimeFigureOut">
               <a:rPr lang="en-IN" smtClean="0"/>
-              <a:t>03-06-2026</a:t>
+              <a:t>04-06-2026</a:t>
             </a:fld>
             <a:endParaRPr lang="en-IN"/>
           </a:p>
@@ -4954,7 +4953,7 @@
           <a:p>
             <a:fld id="{DC8321A5-74C1-4574-A6AA-F1EDDDF12D9F}" type="datetimeFigureOut">
               <a:rPr lang="en-IN" smtClean="0"/>
-              <a:t>03-06-2026</a:t>
+              <a:t>04-06-2026</a:t>
             </a:fld>
             <a:endParaRPr lang="en-IN"/>
           </a:p>
@@ -5049,7 +5048,7 @@
           <a:p>
             <a:fld id="{DC8321A5-74C1-4574-A6AA-F1EDDDF12D9F}" type="datetimeFigureOut">
               <a:rPr lang="en-IN" smtClean="0"/>
-              <a:t>03-06-2026</a:t>
+              <a:t>04-06-2026</a:t>
             </a:fld>
             <a:endParaRPr lang="en-IN"/>
           </a:p>
@@ -5328,7 +5327,7 @@
           <a:p>
             <a:fld id="{DC8321A5-74C1-4574-A6AA-F1EDDDF12D9F}" type="datetimeFigureOut">
               <a:rPr lang="en-IN" smtClean="0"/>
-              <a:t>03-06-2026</a:t>
+              <a:t>04-06-2026</a:t>
             </a:fld>
             <a:endParaRPr lang="en-IN"/>
           </a:p>
@@ -5603,7 +5602,7 @@
           <a:p>
             <a:fld id="{DC8321A5-74C1-4574-A6AA-F1EDDDF12D9F}" type="datetimeFigureOut">
               <a:rPr lang="en-IN" smtClean="0"/>
-              <a:t>03-06-2026</a:t>
+              <a:t>04-06-2026</a:t>
             </a:fld>
             <a:endParaRPr lang="en-IN"/>
           </a:p>
@@ -6032,7 +6031,7 @@
           <a:p>
             <a:fld id="{DC8321A5-74C1-4574-A6AA-F1EDDDF12D9F}" type="datetimeFigureOut">
               <a:rPr lang="en-IN" smtClean="0"/>
-              <a:t>03-06-2026</a:t>
+              <a:t>04-06-2026</a:t>
             </a:fld>
             <a:endParaRPr lang="en-IN"/>
           </a:p>
@@ -9208,7 +9207,33 @@
                 <a:effectLst/>
                 <a:latin typeface="Candara" panose="020E0502030303020204" pitchFamily="34" charset="0"/>
               </a:rPr>
-              <a:t> Stores quantitative, measurable metrics and foreign keys, recording specific business events or transactions (e.g., sales revenue, quantity sold).</a:t>
+              <a:t> Stores quantitative, measurable metrics and foreign keys, recording specific business events or transactions (e.g</a:t>
+            </a:r>
+            <a:r>
+              <a:rPr kumimoji="0" lang="en-US" altLang="en-US" sz="1800" b="0" i="0" u="none" strike="noStrike" cap="none" normalizeH="0" baseline="0" smtClean="0">
+                <a:ln>
+                  <a:noFill/>
+                </a:ln>
+                <a:solidFill>
+                  <a:schemeClr val="tx1"/>
+                </a:solidFill>
+                <a:effectLst/>
+                <a:latin typeface="Candara" panose="020E0502030303020204" pitchFamily="34" charset="0"/>
+              </a:rPr>
+              <a:t>., sales </a:t>
+            </a:r>
+            <a:r>
+              <a:rPr kumimoji="0" lang="en-US" altLang="en-US" sz="1800" b="0" i="0" u="none" strike="noStrike" cap="none" normalizeH="0" baseline="0" dirty="0" smtClean="0">
+                <a:ln>
+                  <a:noFill/>
+                </a:ln>
+                <a:solidFill>
+                  <a:schemeClr val="tx1"/>
+                </a:solidFill>
+                <a:effectLst/>
+                <a:latin typeface="Candara" panose="020E0502030303020204" pitchFamily="34" charset="0"/>
+              </a:rPr>
+              <a:t>revenue, quantity sold).</a:t>
             </a:r>
           </a:p>
           <a:p>
@@ -13467,32 +13492,25 @@
           <a:lstStyle/>
           <a:p>
             <a:r>
-              <a:rPr lang="en-IN" dirty="0" err="1">
+              <a:rPr lang="en-IN" smtClean="0">
                 <a:latin typeface="Courier New" panose="02070309020205020404" pitchFamily="49" charset="0"/>
                 <a:cs typeface="Courier New" panose="02070309020205020404" pitchFamily="49" charset="0"/>
               </a:rPr>
-              <a:t>Total_Sales</a:t>
-            </a:r>
-            <a:r>
-              <a:rPr lang="en-IN" dirty="0">
-                <a:latin typeface="Courier New" panose="02070309020205020404" pitchFamily="49" charset="0"/>
-                <a:cs typeface="Courier New" panose="02070309020205020404" pitchFamily="49" charset="0"/>
-              </a:rPr>
-              <a:t> </a:t>
+              <a:t>Total_Sales  </a:t>
             </a:r>
             <a:r>
               <a:rPr lang="en-IN" dirty="0" smtClean="0">
                 <a:latin typeface="Courier New" panose="02070309020205020404" pitchFamily="49" charset="0"/>
                 <a:cs typeface="Courier New" panose="02070309020205020404" pitchFamily="49" charset="0"/>
               </a:rPr>
-              <a:t> 		= </a:t>
-            </a:r>
-            <a:r>
-              <a:rPr lang="en-IN" dirty="0">
+              <a:t>		</a:t>
+            </a:r>
+            <a:r>
+              <a:rPr lang="en-IN" smtClean="0">
                 <a:latin typeface="Courier New" panose="02070309020205020404" pitchFamily="49" charset="0"/>
                 <a:cs typeface="Courier New" panose="02070309020205020404" pitchFamily="49" charset="0"/>
               </a:rPr>
-              <a:t>SUM(Sales[Amount</a:t>
+              <a:t>= SUM(Sales[Amount</a:t>
             </a:r>
             <a:r>
               <a:rPr lang="en-IN" dirty="0" smtClean="0">
@@ -13515,21 +13533,14 @@
                 <a:latin typeface="Courier New" panose="02070309020205020404" pitchFamily="49" charset="0"/>
                 <a:cs typeface="Courier New" panose="02070309020205020404" pitchFamily="49" charset="0"/>
               </a:rPr>
-              <a:t> 		= </a:t>
-            </a:r>
-            <a:r>
-              <a:rPr lang="en-IN" dirty="0">
+              <a:t> 		</a:t>
+            </a:r>
+            <a:r>
+              <a:rPr lang="en-IN" smtClean="0">
                 <a:latin typeface="Courier New" panose="02070309020205020404" pitchFamily="49" charset="0"/>
                 <a:cs typeface="Courier New" panose="02070309020205020404" pitchFamily="49" charset="0"/>
               </a:rPr>
-              <a:t>COUNT(Sales[</a:t>
-            </a:r>
-            <a:r>
-              <a:rPr lang="en-IN" dirty="0" err="1">
-                <a:latin typeface="Courier New" panose="02070309020205020404" pitchFamily="49" charset="0"/>
-                <a:cs typeface="Courier New" panose="02070309020205020404" pitchFamily="49" charset="0"/>
-              </a:rPr>
-              <a:t>OrderID</a:t>
+              <a:t>= COUNT(Sales[OrderID</a:t>
             </a:r>
             <a:r>
               <a:rPr lang="en-IN" dirty="0">
@@ -14586,15 +14597,23 @@
                           <a:latin typeface="Courier New" panose="02070309020205020404" pitchFamily="49" charset="0"/>
                           <a:cs typeface="Courier New" panose="02070309020205020404" pitchFamily="49" charset="0"/>
                         </a:rPr>
-                        <a:t> = DAY(Sales[</a:t>
+                        <a:t> </a:t>
                       </a:r>
                       <a:r>
-                        <a:rPr lang="en-IN" sz="1200" u="none" strike="noStrike" dirty="0" err="1">
+                        <a:rPr lang="en-IN" sz="1200" u="none" strike="noStrike">
                           <a:effectLst/>
                           <a:latin typeface="Courier New" panose="02070309020205020404" pitchFamily="49" charset="0"/>
                           <a:cs typeface="Courier New" panose="02070309020205020404" pitchFamily="49" charset="0"/>
                         </a:rPr>
-                        <a:t>InvoiceDate</a:t>
+                        <a:t>= </a:t>
+                      </a:r>
+                      <a:r>
+                        <a:rPr lang="en-IN" sz="1200" u="none" strike="noStrike" smtClean="0">
+                          <a:effectLst/>
+                          <a:latin typeface="Courier New" panose="02070309020205020404" pitchFamily="49" charset="0"/>
+                          <a:cs typeface="Courier New" panose="02070309020205020404" pitchFamily="49" charset="0"/>
+                        </a:rPr>
+                        <a:t>DAY(Sales[InvoiceDate</a:t>
                       </a:r>
                       <a:r>
                         <a:rPr lang="en-IN" sz="1200" u="none" strike="noStrike" dirty="0">
@@ -14656,14 +14675,54 @@
                     <a:p>
                       <a:pPr algn="l" fontAlgn="b"/>
                       <a:r>
+                        <a:rPr lang="en-IN" sz="1200" u="none" strike="noStrike" dirty="0">
+                          <a:effectLst/>
+                          <a:latin typeface="Courier New" panose="02070309020205020404" pitchFamily="49" charset="0"/>
+                          <a:cs typeface="Courier New" panose="02070309020205020404" pitchFamily="49" charset="0"/>
+                        </a:rPr>
+                        <a:t> </a:t>
+                      </a:r>
+                      <a:r>
+                        <a:rPr lang="en-IN" sz="1200" u="none" strike="noStrike" dirty="0" err="1">
+                          <a:effectLst/>
+                          <a:latin typeface="Courier New" panose="02070309020205020404" pitchFamily="49" charset="0"/>
+                          <a:cs typeface="Courier New" panose="02070309020205020404" pitchFamily="49" charset="0"/>
+                        </a:rPr>
+                        <a:t>TwoMonthsLater</a:t>
+                      </a:r>
+                      <a:r>
+                        <a:rPr lang="en-IN" sz="1200" u="none" strike="noStrike" dirty="0">
+                          <a:effectLst/>
+                          <a:latin typeface="Courier New" panose="02070309020205020404" pitchFamily="49" charset="0"/>
+                          <a:cs typeface="Courier New" panose="02070309020205020404" pitchFamily="49" charset="0"/>
+                        </a:rPr>
+                        <a:t> </a:t>
+                      </a:r>
+                      <a:r>
                         <a:rPr lang="en-IN" sz="1200" u="none" strike="noStrike">
                           <a:effectLst/>
                           <a:latin typeface="Courier New" panose="02070309020205020404" pitchFamily="49" charset="0"/>
                           <a:cs typeface="Courier New" panose="02070309020205020404" pitchFamily="49" charset="0"/>
                         </a:rPr>
-                        <a:t> TwoMonthsLater = EDATE(Sales[OrderDate], 2)</a:t>
+                        <a:t>= </a:t>
                       </a:r>
-                      <a:endParaRPr lang="en-IN" sz="1200" b="0" i="0" u="none" strike="noStrike">
+                      <a:r>
+                        <a:rPr lang="en-IN" sz="1200" u="none" strike="noStrike" smtClean="0">
+                          <a:effectLst/>
+                          <a:latin typeface="Courier New" panose="02070309020205020404" pitchFamily="49" charset="0"/>
+                          <a:cs typeface="Courier New" panose="02070309020205020404" pitchFamily="49" charset="0"/>
+                        </a:rPr>
+                        <a:t>EDATE(Sales[OrderDate</a:t>
+                      </a:r>
+                      <a:r>
+                        <a:rPr lang="en-IN" sz="1200" u="none" strike="noStrike" dirty="0">
+                          <a:effectLst/>
+                          <a:latin typeface="Courier New" panose="02070309020205020404" pitchFamily="49" charset="0"/>
+                          <a:cs typeface="Courier New" panose="02070309020205020404" pitchFamily="49" charset="0"/>
+                        </a:rPr>
+                        <a:t>], 2)</a:t>
+                      </a:r>
+                      <a:endParaRPr lang="en-IN" sz="1200" b="0" i="0" u="none" strike="noStrike" dirty="0">
                         <a:solidFill>
                           <a:srgbClr val="000000"/>
                         </a:solidFill>
@@ -14715,14 +14774,54 @@
                     <a:p>
                       <a:pPr algn="l" fontAlgn="b"/>
                       <a:r>
+                        <a:rPr lang="en-IN" sz="1200" u="none" strike="noStrike" dirty="0">
+                          <a:effectLst/>
+                          <a:latin typeface="Courier New" panose="02070309020205020404" pitchFamily="49" charset="0"/>
+                          <a:cs typeface="Courier New" panose="02070309020205020404" pitchFamily="49" charset="0"/>
+                        </a:rPr>
+                        <a:t> </a:t>
+                      </a:r>
+                      <a:r>
+                        <a:rPr lang="en-IN" sz="1200" u="none" strike="noStrike" dirty="0" err="1">
+                          <a:effectLst/>
+                          <a:latin typeface="Courier New" panose="02070309020205020404" pitchFamily="49" charset="0"/>
+                          <a:cs typeface="Courier New" panose="02070309020205020404" pitchFamily="49" charset="0"/>
+                        </a:rPr>
+                        <a:t>MonthEnd</a:t>
+                      </a:r>
+                      <a:r>
+                        <a:rPr lang="en-IN" sz="1200" u="none" strike="noStrike" dirty="0">
+                          <a:effectLst/>
+                          <a:latin typeface="Courier New" panose="02070309020205020404" pitchFamily="49" charset="0"/>
+                          <a:cs typeface="Courier New" panose="02070309020205020404" pitchFamily="49" charset="0"/>
+                        </a:rPr>
+                        <a:t> </a:t>
+                      </a:r>
+                      <a:r>
                         <a:rPr lang="en-IN" sz="1200" u="none" strike="noStrike">
                           <a:effectLst/>
                           <a:latin typeface="Courier New" panose="02070309020205020404" pitchFamily="49" charset="0"/>
                           <a:cs typeface="Courier New" panose="02070309020205020404" pitchFamily="49" charset="0"/>
                         </a:rPr>
-                        <a:t> MonthEnd = EOMONTH(Sales[OrderDate], 0)</a:t>
+                        <a:t>= </a:t>
                       </a:r>
-                      <a:endParaRPr lang="en-IN" sz="1200" b="0" i="0" u="none" strike="noStrike">
+                      <a:r>
+                        <a:rPr lang="en-IN" sz="1200" u="none" strike="noStrike" smtClean="0">
+                          <a:effectLst/>
+                          <a:latin typeface="Courier New" panose="02070309020205020404" pitchFamily="49" charset="0"/>
+                          <a:cs typeface="Courier New" panose="02070309020205020404" pitchFamily="49" charset="0"/>
+                        </a:rPr>
+                        <a:t>EOMONTH(Sales[OrderDate</a:t>
+                      </a:r>
+                      <a:r>
+                        <a:rPr lang="en-IN" sz="1200" u="none" strike="noStrike" dirty="0">
+                          <a:effectLst/>
+                          <a:latin typeface="Courier New" panose="02070309020205020404" pitchFamily="49" charset="0"/>
+                          <a:cs typeface="Courier New" panose="02070309020205020404" pitchFamily="49" charset="0"/>
+                        </a:rPr>
+                        <a:t>], 0)</a:t>
+                      </a:r>
+                      <a:endParaRPr lang="en-IN" sz="1200" b="0" i="0" u="none" strike="noStrike" dirty="0">
                         <a:solidFill>
                           <a:srgbClr val="000000"/>
                         </a:solidFill>
@@ -14795,7 +14894,31 @@
                           <a:latin typeface="Courier New" panose="02070309020205020404" pitchFamily="49" charset="0"/>
                           <a:cs typeface="Courier New" panose="02070309020205020404" pitchFamily="49" charset="0"/>
                         </a:rPr>
-                        <a:t> = HOUR(Sales[Timestamp])</a:t>
+                        <a:t> </a:t>
+                      </a:r>
+                      <a:r>
+                        <a:rPr lang="en-IN" sz="1200" u="none" strike="noStrike">
+                          <a:effectLst/>
+                          <a:latin typeface="Courier New" panose="02070309020205020404" pitchFamily="49" charset="0"/>
+                          <a:cs typeface="Courier New" panose="02070309020205020404" pitchFamily="49" charset="0"/>
+                        </a:rPr>
+                        <a:t>= </a:t>
+                      </a:r>
+                      <a:r>
+                        <a:rPr lang="en-IN" sz="1200" u="none" strike="noStrike" smtClean="0">
+                          <a:effectLst/>
+                          <a:latin typeface="Courier New" panose="02070309020205020404" pitchFamily="49" charset="0"/>
+                          <a:cs typeface="Courier New" panose="02070309020205020404" pitchFamily="49" charset="0"/>
+                        </a:rPr>
+                        <a:t>HOUR(Sales[Timestamp</a:t>
+                      </a:r>
+                      <a:r>
+                        <a:rPr lang="en-IN" sz="1200" u="none" strike="noStrike" dirty="0">
+                          <a:effectLst/>
+                          <a:latin typeface="Courier New" panose="02070309020205020404" pitchFamily="49" charset="0"/>
+                          <a:cs typeface="Courier New" panose="02070309020205020404" pitchFamily="49" charset="0"/>
+                        </a:rPr>
+                        <a:t>])</a:t>
                       </a:r>
                       <a:endParaRPr lang="en-IN" sz="1200" b="0" i="0" u="none" strike="noStrike" dirty="0">
                         <a:solidFill>
@@ -14849,14 +14972,54 @@
                     <a:p>
                       <a:pPr algn="l" fontAlgn="b"/>
                       <a:r>
+                        <a:rPr lang="en-IN" sz="1200" u="none" strike="noStrike" dirty="0">
+                          <a:effectLst/>
+                          <a:latin typeface="Courier New" panose="02070309020205020404" pitchFamily="49" charset="0"/>
+                          <a:cs typeface="Courier New" panose="02070309020205020404" pitchFamily="49" charset="0"/>
+                        </a:rPr>
+                        <a:t> </a:t>
+                      </a:r>
+                      <a:r>
+                        <a:rPr lang="en-IN" sz="1200" u="none" strike="noStrike" dirty="0" err="1">
+                          <a:effectLst/>
+                          <a:latin typeface="Courier New" panose="02070309020205020404" pitchFamily="49" charset="0"/>
+                          <a:cs typeface="Courier New" panose="02070309020205020404" pitchFamily="49" charset="0"/>
+                        </a:rPr>
+                        <a:t>OrderMinute</a:t>
+                      </a:r>
+                      <a:r>
+                        <a:rPr lang="en-IN" sz="1200" u="none" strike="noStrike" dirty="0">
+                          <a:effectLst/>
+                          <a:latin typeface="Courier New" panose="02070309020205020404" pitchFamily="49" charset="0"/>
+                          <a:cs typeface="Courier New" panose="02070309020205020404" pitchFamily="49" charset="0"/>
+                        </a:rPr>
+                        <a:t> </a:t>
+                      </a:r>
+                      <a:r>
                         <a:rPr lang="en-IN" sz="1200" u="none" strike="noStrike">
                           <a:effectLst/>
                           <a:latin typeface="Courier New" panose="02070309020205020404" pitchFamily="49" charset="0"/>
                           <a:cs typeface="Courier New" panose="02070309020205020404" pitchFamily="49" charset="0"/>
                         </a:rPr>
-                        <a:t> OrderMinute = MINUTE(Sales[Timestamp])</a:t>
+                        <a:t>= </a:t>
                       </a:r>
-                      <a:endParaRPr lang="en-IN" sz="1200" b="0" i="0" u="none" strike="noStrike">
+                      <a:r>
+                        <a:rPr lang="en-IN" sz="1200" u="none" strike="noStrike" smtClean="0">
+                          <a:effectLst/>
+                          <a:latin typeface="Courier New" panose="02070309020205020404" pitchFamily="49" charset="0"/>
+                          <a:cs typeface="Courier New" panose="02070309020205020404" pitchFamily="49" charset="0"/>
+                        </a:rPr>
+                        <a:t>MINUTE(Sales[Timestamp</a:t>
+                      </a:r>
+                      <a:r>
+                        <a:rPr lang="en-IN" sz="1200" u="none" strike="noStrike" dirty="0">
+                          <a:effectLst/>
+                          <a:latin typeface="Courier New" panose="02070309020205020404" pitchFamily="49" charset="0"/>
+                          <a:cs typeface="Courier New" panose="02070309020205020404" pitchFamily="49" charset="0"/>
+                        </a:rPr>
+                        <a:t>])</a:t>
+                      </a:r>
+                      <a:endParaRPr lang="en-IN" sz="1200" b="0" i="0" u="none" strike="noStrike" dirty="0">
                         <a:solidFill>
                           <a:srgbClr val="000000"/>
                         </a:solidFill>
@@ -14908,14 +15071,54 @@
                     <a:p>
                       <a:pPr algn="l" fontAlgn="b"/>
                       <a:r>
+                        <a:rPr lang="en-IN" sz="1200" u="none" strike="noStrike" dirty="0">
+                          <a:effectLst/>
+                          <a:latin typeface="Courier New" panose="02070309020205020404" pitchFamily="49" charset="0"/>
+                          <a:cs typeface="Courier New" panose="02070309020205020404" pitchFamily="49" charset="0"/>
+                        </a:rPr>
+                        <a:t> </a:t>
+                      </a:r>
+                      <a:r>
+                        <a:rPr lang="en-IN" sz="1200" u="none" strike="noStrike" dirty="0" err="1">
+                          <a:effectLst/>
+                          <a:latin typeface="Courier New" panose="02070309020205020404" pitchFamily="49" charset="0"/>
+                          <a:cs typeface="Courier New" panose="02070309020205020404" pitchFamily="49" charset="0"/>
+                        </a:rPr>
+                        <a:t>MonthNumber</a:t>
+                      </a:r>
+                      <a:r>
+                        <a:rPr lang="en-IN" sz="1200" u="none" strike="noStrike" dirty="0">
+                          <a:effectLst/>
+                          <a:latin typeface="Courier New" panose="02070309020205020404" pitchFamily="49" charset="0"/>
+                          <a:cs typeface="Courier New" panose="02070309020205020404" pitchFamily="49" charset="0"/>
+                        </a:rPr>
+                        <a:t> </a:t>
+                      </a:r>
+                      <a:r>
                         <a:rPr lang="en-IN" sz="1200" u="none" strike="noStrike">
                           <a:effectLst/>
                           <a:latin typeface="Courier New" panose="02070309020205020404" pitchFamily="49" charset="0"/>
                           <a:cs typeface="Courier New" panose="02070309020205020404" pitchFamily="49" charset="0"/>
                         </a:rPr>
-                        <a:t> MonthNumber = MONTH(Sales[OrderDate])</a:t>
+                        <a:t>= </a:t>
                       </a:r>
-                      <a:endParaRPr lang="en-IN" sz="1200" b="0" i="0" u="none" strike="noStrike">
+                      <a:r>
+                        <a:rPr lang="en-IN" sz="1200" u="none" strike="noStrike" smtClean="0">
+                          <a:effectLst/>
+                          <a:latin typeface="Courier New" panose="02070309020205020404" pitchFamily="49" charset="0"/>
+                          <a:cs typeface="Courier New" panose="02070309020205020404" pitchFamily="49" charset="0"/>
+                        </a:rPr>
+                        <a:t>MONTH(Sales[OrderDate</a:t>
+                      </a:r>
+                      <a:r>
+                        <a:rPr lang="en-IN" sz="1200" u="none" strike="noStrike" dirty="0">
+                          <a:effectLst/>
+                          <a:latin typeface="Courier New" panose="02070309020205020404" pitchFamily="49" charset="0"/>
+                          <a:cs typeface="Courier New" panose="02070309020205020404" pitchFamily="49" charset="0"/>
+                        </a:rPr>
+                        <a:t>])</a:t>
+                      </a:r>
+                      <a:endParaRPr lang="en-IN" sz="1200" b="0" i="0" u="none" strike="noStrike" dirty="0">
                         <a:solidFill>
                           <a:srgbClr val="000000"/>
                         </a:solidFill>
@@ -15026,14 +15229,54 @@
                     <a:p>
                       <a:pPr algn="l" fontAlgn="b"/>
                       <a:r>
+                        <a:rPr lang="en-IN" sz="1200" u="none" strike="noStrike" dirty="0">
+                          <a:effectLst/>
+                          <a:latin typeface="Courier New" panose="02070309020205020404" pitchFamily="49" charset="0"/>
+                          <a:cs typeface="Courier New" panose="02070309020205020404" pitchFamily="49" charset="0"/>
+                        </a:rPr>
+                        <a:t> </a:t>
+                      </a:r>
+                      <a:r>
+                        <a:rPr lang="en-IN" sz="1200" u="none" strike="noStrike" dirty="0" err="1">
+                          <a:effectLst/>
+                          <a:latin typeface="Courier New" panose="02070309020205020404" pitchFamily="49" charset="0"/>
+                          <a:cs typeface="Courier New" panose="02070309020205020404" pitchFamily="49" charset="0"/>
+                        </a:rPr>
+                        <a:t>CurrentQuarter</a:t>
+                      </a:r>
+                      <a:r>
+                        <a:rPr lang="en-IN" sz="1200" u="none" strike="noStrike" dirty="0">
+                          <a:effectLst/>
+                          <a:latin typeface="Courier New" panose="02070309020205020404" pitchFamily="49" charset="0"/>
+                          <a:cs typeface="Courier New" panose="02070309020205020404" pitchFamily="49" charset="0"/>
+                        </a:rPr>
+                        <a:t> </a:t>
+                      </a:r>
+                      <a:r>
                         <a:rPr lang="en-IN" sz="1200" u="none" strike="noStrike">
                           <a:effectLst/>
                           <a:latin typeface="Courier New" panose="02070309020205020404" pitchFamily="49" charset="0"/>
                           <a:cs typeface="Courier New" panose="02070309020205020404" pitchFamily="49" charset="0"/>
                         </a:rPr>
-                        <a:t> CurrentQuarter = QUARTER(Sales[OrderDate])</a:t>
+                        <a:t>= </a:t>
                       </a:r>
-                      <a:endParaRPr lang="en-IN" sz="1200" b="0" i="0" u="none" strike="noStrike">
+                      <a:r>
+                        <a:rPr lang="en-IN" sz="1200" u="none" strike="noStrike" smtClean="0">
+                          <a:effectLst/>
+                          <a:latin typeface="Courier New" panose="02070309020205020404" pitchFamily="49" charset="0"/>
+                          <a:cs typeface="Courier New" panose="02070309020205020404" pitchFamily="49" charset="0"/>
+                        </a:rPr>
+                        <a:t>QUARTER(Sales[OrderDate</a:t>
+                      </a:r>
+                      <a:r>
+                        <a:rPr lang="en-IN" sz="1200" u="none" strike="noStrike" dirty="0">
+                          <a:effectLst/>
+                          <a:latin typeface="Courier New" panose="02070309020205020404" pitchFamily="49" charset="0"/>
+                          <a:cs typeface="Courier New" panose="02070309020205020404" pitchFamily="49" charset="0"/>
+                        </a:rPr>
+                        <a:t>])</a:t>
+                      </a:r>
+                      <a:endParaRPr lang="en-IN" sz="1200" b="0" i="0" u="none" strike="noStrike" dirty="0">
                         <a:solidFill>
                           <a:srgbClr val="000000"/>
                         </a:solidFill>
@@ -15085,14 +15328,54 @@
                     <a:p>
                       <a:pPr algn="l" fontAlgn="b"/>
                       <a:r>
+                        <a:rPr lang="en-IN" sz="1200" u="none" strike="noStrike" dirty="0">
+                          <a:effectLst/>
+                          <a:latin typeface="Courier New" panose="02070309020205020404" pitchFamily="49" charset="0"/>
+                          <a:cs typeface="Courier New" panose="02070309020205020404" pitchFamily="49" charset="0"/>
+                        </a:rPr>
+                        <a:t> </a:t>
+                      </a:r>
+                      <a:r>
+                        <a:rPr lang="en-IN" sz="1200" u="none" strike="noStrike" dirty="0" err="1">
+                          <a:effectLst/>
+                          <a:latin typeface="Courier New" panose="02070309020205020404" pitchFamily="49" charset="0"/>
+                          <a:cs typeface="Courier New" panose="02070309020205020404" pitchFamily="49" charset="0"/>
+                        </a:rPr>
+                        <a:t>OrderSecond</a:t>
+                      </a:r>
+                      <a:r>
+                        <a:rPr lang="en-IN" sz="1200" u="none" strike="noStrike" dirty="0">
+                          <a:effectLst/>
+                          <a:latin typeface="Courier New" panose="02070309020205020404" pitchFamily="49" charset="0"/>
+                          <a:cs typeface="Courier New" panose="02070309020205020404" pitchFamily="49" charset="0"/>
+                        </a:rPr>
+                        <a:t> </a:t>
+                      </a:r>
+                      <a:r>
                         <a:rPr lang="en-IN" sz="1200" u="none" strike="noStrike">
                           <a:effectLst/>
                           <a:latin typeface="Courier New" panose="02070309020205020404" pitchFamily="49" charset="0"/>
                           <a:cs typeface="Courier New" panose="02070309020205020404" pitchFamily="49" charset="0"/>
                         </a:rPr>
-                        <a:t> OrderSecond = SECOND(Sales[Timestamp])</a:t>
+                        <a:t>= </a:t>
                       </a:r>
-                      <a:endParaRPr lang="en-IN" sz="1200" b="0" i="0" u="none" strike="noStrike">
+                      <a:r>
+                        <a:rPr lang="en-IN" sz="1200" u="none" strike="noStrike" smtClean="0">
+                          <a:effectLst/>
+                          <a:latin typeface="Courier New" panose="02070309020205020404" pitchFamily="49" charset="0"/>
+                          <a:cs typeface="Courier New" panose="02070309020205020404" pitchFamily="49" charset="0"/>
+                        </a:rPr>
+                        <a:t>SECOND(Sales[Timestamp</a:t>
+                      </a:r>
+                      <a:r>
+                        <a:rPr lang="en-IN" sz="1200" u="none" strike="noStrike" dirty="0">
+                          <a:effectLst/>
+                          <a:latin typeface="Courier New" panose="02070309020205020404" pitchFamily="49" charset="0"/>
+                          <a:cs typeface="Courier New" panose="02070309020205020404" pitchFamily="49" charset="0"/>
+                        </a:rPr>
+                        <a:t>])</a:t>
+                      </a:r>
+                      <a:endParaRPr lang="en-IN" sz="1200" b="0" i="0" u="none" strike="noStrike" dirty="0">
                         <a:solidFill>
                           <a:srgbClr val="000000"/>
                         </a:solidFill>
@@ -15321,14 +15604,54 @@
                     <a:p>
                       <a:pPr algn="l" fontAlgn="b"/>
                       <a:r>
+                        <a:rPr lang="en-IN" sz="1200" u="none" strike="noStrike" dirty="0">
+                          <a:effectLst/>
+                          <a:latin typeface="Courier New" panose="02070309020205020404" pitchFamily="49" charset="0"/>
+                          <a:cs typeface="Courier New" panose="02070309020205020404" pitchFamily="49" charset="0"/>
+                        </a:rPr>
+                        <a:t> </a:t>
+                      </a:r>
+                      <a:r>
+                        <a:rPr lang="en-IN" sz="1200" u="none" strike="noStrike" dirty="0" err="1">
+                          <a:effectLst/>
+                          <a:latin typeface="Courier New" panose="02070309020205020404" pitchFamily="49" charset="0"/>
+                          <a:cs typeface="Courier New" panose="02070309020205020404" pitchFamily="49" charset="0"/>
+                        </a:rPr>
+                        <a:t>DayOfWeek</a:t>
+                      </a:r>
+                      <a:r>
+                        <a:rPr lang="en-IN" sz="1200" u="none" strike="noStrike" dirty="0">
+                          <a:effectLst/>
+                          <a:latin typeface="Courier New" panose="02070309020205020404" pitchFamily="49" charset="0"/>
+                          <a:cs typeface="Courier New" panose="02070309020205020404" pitchFamily="49" charset="0"/>
+                        </a:rPr>
+                        <a:t> </a:t>
+                      </a:r>
+                      <a:r>
                         <a:rPr lang="en-IN" sz="1200" u="none" strike="noStrike">
                           <a:effectLst/>
                           <a:latin typeface="Courier New" panose="02070309020205020404" pitchFamily="49" charset="0"/>
                           <a:cs typeface="Courier New" panose="02070309020205020404" pitchFamily="49" charset="0"/>
                         </a:rPr>
-                        <a:t> DayOfWeek = WEEKDAY(Sales[OrderDate], 2)</a:t>
+                        <a:t>= </a:t>
                       </a:r>
-                      <a:endParaRPr lang="en-IN" sz="1200" b="0" i="0" u="none" strike="noStrike">
+                      <a:r>
+                        <a:rPr lang="en-IN" sz="1200" u="none" strike="noStrike" smtClean="0">
+                          <a:effectLst/>
+                          <a:latin typeface="Courier New" panose="02070309020205020404" pitchFamily="49" charset="0"/>
+                          <a:cs typeface="Courier New" panose="02070309020205020404" pitchFamily="49" charset="0"/>
+                        </a:rPr>
+                        <a:t>WEEKDAY(Sales[OrderDate</a:t>
+                      </a:r>
+                      <a:r>
+                        <a:rPr lang="en-IN" sz="1200" u="none" strike="noStrike" dirty="0">
+                          <a:effectLst/>
+                          <a:latin typeface="Courier New" panose="02070309020205020404" pitchFamily="49" charset="0"/>
+                          <a:cs typeface="Courier New" panose="02070309020205020404" pitchFamily="49" charset="0"/>
+                        </a:rPr>
+                        <a:t>], 2)</a:t>
+                      </a:r>
+                      <a:endParaRPr lang="en-IN" sz="1200" b="0" i="0" u="none" strike="noStrike" dirty="0">
                         <a:solidFill>
                           <a:srgbClr val="000000"/>
                         </a:solidFill>
@@ -15380,14 +15703,54 @@
                     <a:p>
                       <a:pPr algn="l" fontAlgn="b"/>
                       <a:r>
+                        <a:rPr lang="en-IN" sz="1200" u="none" strike="noStrike" dirty="0">
+                          <a:effectLst/>
+                          <a:latin typeface="Courier New" panose="02070309020205020404" pitchFamily="49" charset="0"/>
+                          <a:cs typeface="Courier New" panose="02070309020205020404" pitchFamily="49" charset="0"/>
+                        </a:rPr>
+                        <a:t> </a:t>
+                      </a:r>
+                      <a:r>
+                        <a:rPr lang="en-IN" sz="1200" u="none" strike="noStrike" dirty="0" err="1">
+                          <a:effectLst/>
+                          <a:latin typeface="Courier New" panose="02070309020205020404" pitchFamily="49" charset="0"/>
+                          <a:cs typeface="Courier New" panose="02070309020205020404" pitchFamily="49" charset="0"/>
+                        </a:rPr>
+                        <a:t>WeekOfYear</a:t>
+                      </a:r>
+                      <a:r>
+                        <a:rPr lang="en-IN" sz="1200" u="none" strike="noStrike" dirty="0">
+                          <a:effectLst/>
+                          <a:latin typeface="Courier New" panose="02070309020205020404" pitchFamily="49" charset="0"/>
+                          <a:cs typeface="Courier New" panose="02070309020205020404" pitchFamily="49" charset="0"/>
+                        </a:rPr>
+                        <a:t> </a:t>
+                      </a:r>
+                      <a:r>
                         <a:rPr lang="en-IN" sz="1200" u="none" strike="noStrike">
                           <a:effectLst/>
                           <a:latin typeface="Courier New" panose="02070309020205020404" pitchFamily="49" charset="0"/>
                           <a:cs typeface="Courier New" panose="02070309020205020404" pitchFamily="49" charset="0"/>
                         </a:rPr>
-                        <a:t> WeekOfYear = WEEKNUM(Sales[OrderDate])</a:t>
+                        <a:t>= </a:t>
                       </a:r>
-                      <a:endParaRPr lang="en-IN" sz="1200" b="0" i="0" u="none" strike="noStrike">
+                      <a:r>
+                        <a:rPr lang="en-IN" sz="1200" u="none" strike="noStrike" smtClean="0">
+                          <a:effectLst/>
+                          <a:latin typeface="Courier New" panose="02070309020205020404" pitchFamily="49" charset="0"/>
+                          <a:cs typeface="Courier New" panose="02070309020205020404" pitchFamily="49" charset="0"/>
+                        </a:rPr>
+                        <a:t>WEEKNUM(Sales[OrderDate</a:t>
+                      </a:r>
+                      <a:r>
+                        <a:rPr lang="en-IN" sz="1200" u="none" strike="noStrike" dirty="0">
+                          <a:effectLst/>
+                          <a:latin typeface="Courier New" panose="02070309020205020404" pitchFamily="49" charset="0"/>
+                          <a:cs typeface="Courier New" panose="02070309020205020404" pitchFamily="49" charset="0"/>
+                        </a:rPr>
+                        <a:t>])</a:t>
+                      </a:r>
+                      <a:endParaRPr lang="en-IN" sz="1200" b="0" i="0" u="none" strike="noStrike" dirty="0">
                         <a:solidFill>
                           <a:srgbClr val="000000"/>
                         </a:solidFill>
@@ -15460,15 +15823,23 @@
                           <a:latin typeface="Courier New" panose="02070309020205020404" pitchFamily="49" charset="0"/>
                           <a:cs typeface="Courier New" panose="02070309020205020404" pitchFamily="49" charset="0"/>
                         </a:rPr>
-                        <a:t> = YEAR(Sales[</a:t>
+                        <a:t> </a:t>
                       </a:r>
                       <a:r>
-                        <a:rPr lang="en-IN" sz="1200" u="none" strike="noStrike" dirty="0" err="1">
+                        <a:rPr lang="en-IN" sz="1200" u="none" strike="noStrike">
                           <a:effectLst/>
                           <a:latin typeface="Courier New" panose="02070309020205020404" pitchFamily="49" charset="0"/>
                           <a:cs typeface="Courier New" panose="02070309020205020404" pitchFamily="49" charset="0"/>
                         </a:rPr>
-                        <a:t>OrderDate</a:t>
+                        <a:t>= </a:t>
+                      </a:r>
+                      <a:r>
+                        <a:rPr lang="en-IN" sz="1200" u="none" strike="noStrike" smtClean="0">
+                          <a:effectLst/>
+                          <a:latin typeface="Courier New" panose="02070309020205020404" pitchFamily="49" charset="0"/>
+                          <a:cs typeface="Courier New" panose="02070309020205020404" pitchFamily="49" charset="0"/>
+                        </a:rPr>
+                        <a:t>YEAR(Sales[OrderDate</a:t>
                       </a:r>
                       <a:r>
                         <a:rPr lang="en-IN" sz="1200" u="none" strike="noStrike" dirty="0">
@@ -15687,7 +16058,7 @@
                     <a:p>
                       <a:pPr algn="l" fontAlgn="b"/>
                       <a:r>
-                        <a:rPr lang="en-IN" sz="1400" u="none" strike="noStrike" dirty="0" smtClean="0">
+                        <a:rPr lang="en-IN" sz="1400" u="none" strike="noStrike" smtClean="0">
                           <a:effectLst/>
                           <a:latin typeface="Courier New" panose="02070309020205020404" pitchFamily="49" charset="0"/>
                           <a:cs typeface="Courier New" panose="02070309020205020404" pitchFamily="49" charset="0"/>
@@ -15754,12 +16125,12 @@
                     <a:p>
                       <a:pPr algn="l" fontAlgn="b"/>
                       <a:r>
-                        <a:rPr lang="en-IN" sz="1400" u="none" strike="noStrike" dirty="0" smtClean="0">
+                        <a:rPr lang="en-IN" sz="1400" u="none" strike="noStrike" smtClean="0">
                           <a:effectLst/>
                           <a:latin typeface="Courier New" panose="02070309020205020404" pitchFamily="49" charset="0"/>
                           <a:cs typeface="Courier New" panose="02070309020205020404" pitchFamily="49" charset="0"/>
                         </a:rPr>
-                        <a:t> </a:t>
+                        <a:t> ISERROR(Sales[TotalAmount</a:t>
                       </a:r>
                       <a:r>
                         <a:rPr lang="en-IN" sz="1400" u="none" strike="noStrike" dirty="0">
@@ -15767,15 +16138,23 @@
                           <a:latin typeface="Courier New" panose="02070309020205020404" pitchFamily="49" charset="0"/>
                           <a:cs typeface="Courier New" panose="02070309020205020404" pitchFamily="49" charset="0"/>
                         </a:rPr>
-                        <a:t>ISERROR(Sales[</a:t>
+                        <a:t>] </a:t>
                       </a:r>
                       <a:r>
-                        <a:rPr lang="en-IN" sz="1400" u="none" strike="noStrike" dirty="0" err="1">
+                        <a:rPr lang="en-IN" sz="1400" u="none" strike="noStrike">
                           <a:effectLst/>
                           <a:latin typeface="Courier New" panose="02070309020205020404" pitchFamily="49" charset="0"/>
                           <a:cs typeface="Courier New" panose="02070309020205020404" pitchFamily="49" charset="0"/>
                         </a:rPr>
-                        <a:t>TotalAmount</a:t>
+                        <a:t>/ </a:t>
+                      </a:r>
+                      <a:r>
+                        <a:rPr lang="en-IN" sz="1400" u="none" strike="noStrike" smtClean="0">
+                          <a:effectLst/>
+                          <a:latin typeface="Courier New" panose="02070309020205020404" pitchFamily="49" charset="0"/>
+                          <a:cs typeface="Courier New" panose="02070309020205020404" pitchFamily="49" charset="0"/>
+                        </a:rPr>
+                        <a:t>Sales[Quantity</a:t>
                       </a:r>
                       <a:r>
                         <a:rPr lang="en-IN" sz="1400" u="none" strike="noStrike" dirty="0">
@@ -15783,7 +16162,7 @@
                           <a:latin typeface="Courier New" panose="02070309020205020404" pitchFamily="49" charset="0"/>
                           <a:cs typeface="Courier New" panose="02070309020205020404" pitchFamily="49" charset="0"/>
                         </a:rPr>
-                        <a:t>] / Sales[Quantity])</a:t>
+                        <a:t>])</a:t>
                       </a:r>
                       <a:endParaRPr lang="en-IN" sz="1400" b="0" i="0" u="none" strike="noStrike" dirty="0">
                         <a:solidFill>
@@ -15837,20 +16216,12 @@
                     <a:p>
                       <a:pPr algn="l" fontAlgn="b"/>
                       <a:r>
-                        <a:rPr lang="en-IN" sz="1400" u="none" strike="noStrike" dirty="0" smtClean="0">
+                        <a:rPr lang="en-IN" sz="1400" u="none" strike="noStrike" smtClean="0">
                           <a:effectLst/>
                           <a:latin typeface="Courier New" panose="02070309020205020404" pitchFamily="49" charset="0"/>
                           <a:cs typeface="Courier New" panose="02070309020205020404" pitchFamily="49" charset="0"/>
                         </a:rPr>
-                        <a:t> ISNUMBER(Sales[</a:t>
-                      </a:r>
-                      <a:r>
-                        <a:rPr lang="en-IN" sz="1400" u="none" strike="noStrike" dirty="0" err="1" smtClean="0">
-                          <a:effectLst/>
-                          <a:latin typeface="Courier New" panose="02070309020205020404" pitchFamily="49" charset="0"/>
-                          <a:cs typeface="Courier New" panose="02070309020205020404" pitchFamily="49" charset="0"/>
-                        </a:rPr>
-                        <a:t>PostalCode</a:t>
+                        <a:t> ISNUMBER(Sales[PostalCode</a:t>
                       </a:r>
                       <a:r>
                         <a:rPr lang="en-IN" sz="1400" u="none" strike="noStrike" dirty="0">
@@ -15912,20 +16283,12 @@
                     <a:p>
                       <a:pPr algn="l" fontAlgn="b"/>
                       <a:r>
-                        <a:rPr lang="en-IN" sz="1400" u="none" strike="noStrike" dirty="0" smtClean="0">
+                        <a:rPr lang="en-IN" sz="1400" u="none" strike="noStrike" smtClean="0">
                           <a:effectLst/>
                           <a:latin typeface="Courier New" panose="02070309020205020404" pitchFamily="49" charset="0"/>
                           <a:cs typeface="Courier New" panose="02070309020205020404" pitchFamily="49" charset="0"/>
                         </a:rPr>
-                        <a:t> ISTEXT(Sales[</a:t>
-                      </a:r>
-                      <a:r>
-                        <a:rPr lang="en-IN" sz="1400" u="none" strike="noStrike" dirty="0" err="1" smtClean="0">
-                          <a:effectLst/>
-                          <a:latin typeface="Courier New" panose="02070309020205020404" pitchFamily="49" charset="0"/>
-                          <a:cs typeface="Courier New" panose="02070309020205020404" pitchFamily="49" charset="0"/>
-                        </a:rPr>
-                        <a:t>ProductCode</a:t>
+                        <a:t> ISTEXT(Sales[ProductCode</a:t>
                       </a:r>
                       <a:r>
                         <a:rPr lang="en-IN" sz="1400" u="none" strike="noStrike" dirty="0">
@@ -16702,14 +17065,14 @@
                     <a:p>
                       <a:pPr algn="l" fontAlgn="b"/>
                       <a:r>
-                        <a:rPr lang="en-IN" sz="1600" u="none" strike="noStrike">
+                        <a:rPr lang="en-IN" sz="1600" u="none" strike="noStrike" dirty="0">
                           <a:effectLst/>
                           <a:latin typeface="Courier New" panose="02070309020205020404" pitchFamily="49" charset="0"/>
                           <a:cs typeface="Courier New" panose="02070309020205020404" pitchFamily="49" charset="0"/>
                         </a:rPr>
                         <a:t>AND</a:t>
                       </a:r>
-                      <a:endParaRPr lang="en-IN" sz="1600" b="1" i="0" u="none" strike="noStrike">
+                      <a:endParaRPr lang="en-IN" sz="1600" b="1" i="0" u="none" strike="noStrike" dirty="0">
                         <a:solidFill>
                           <a:srgbClr val="000000"/>
                         </a:solidFill>
@@ -16728,7 +17091,7 @@
                     <a:p>
                       <a:pPr algn="l" fontAlgn="b"/>
                       <a:r>
-                        <a:rPr lang="en-US" sz="1200" u="none" strike="noStrike" dirty="0" smtClean="0">
+                        <a:rPr lang="en-US" sz="1200" u="none" strike="noStrike" smtClean="0">
                           <a:effectLst/>
                           <a:latin typeface="Courier New" panose="02070309020205020404" pitchFamily="49" charset="0"/>
                           <a:cs typeface="Courier New" panose="02070309020205020404" pitchFamily="49" charset="0"/>
@@ -16741,7 +17104,31 @@
                           <a:latin typeface="Courier New" panose="02070309020205020404" pitchFamily="49" charset="0"/>
                           <a:cs typeface="Courier New" panose="02070309020205020404" pitchFamily="49" charset="0"/>
                         </a:rPr>
-                        <a:t>] &gt; 100, Sales[Region] = "West")</a:t>
+                        <a:t>] &gt; 100</a:t>
+                      </a:r>
+                      <a:r>
+                        <a:rPr lang="en-US" sz="1200" u="none" strike="noStrike">
+                          <a:effectLst/>
+                          <a:latin typeface="Courier New" panose="02070309020205020404" pitchFamily="49" charset="0"/>
+                          <a:cs typeface="Courier New" panose="02070309020205020404" pitchFamily="49" charset="0"/>
+                        </a:rPr>
+                        <a:t>, </a:t>
+                      </a:r>
+                      <a:r>
+                        <a:rPr lang="en-US" sz="1200" u="none" strike="noStrike" smtClean="0">
+                          <a:effectLst/>
+                          <a:latin typeface="Courier New" panose="02070309020205020404" pitchFamily="49" charset="0"/>
+                          <a:cs typeface="Courier New" panose="02070309020205020404" pitchFamily="49" charset="0"/>
+                        </a:rPr>
+                        <a:t>Sales[Region</a:t>
+                      </a:r>
+                      <a:r>
+                        <a:rPr lang="en-US" sz="1200" u="none" strike="noStrike" dirty="0">
+                          <a:effectLst/>
+                          <a:latin typeface="Courier New" panose="02070309020205020404" pitchFamily="49" charset="0"/>
+                          <a:cs typeface="Courier New" panose="02070309020205020404" pitchFamily="49" charset="0"/>
+                        </a:rPr>
+                        <a:t>] = "West")</a:t>
                       </a:r>
                       <a:endParaRPr lang="en-US" sz="1200" b="0" i="0" u="none" strike="noStrike" dirty="0">
                         <a:solidFill>
@@ -16795,7 +17182,7 @@
                     <a:p>
                       <a:pPr algn="l" fontAlgn="b"/>
                       <a:r>
-                        <a:rPr lang="en-US" sz="1200" u="none" strike="noStrike" dirty="0" smtClean="0">
+                        <a:rPr lang="en-US" sz="1200" u="none" strike="noStrike" smtClean="0">
                           <a:effectLst/>
                           <a:latin typeface="Courier New" panose="02070309020205020404" pitchFamily="49" charset="0"/>
                           <a:cs typeface="Courier New" panose="02070309020205020404" pitchFamily="49" charset="0"/>
@@ -16808,7 +17195,31 @@
                           <a:latin typeface="Courier New" panose="02070309020205020404" pitchFamily="49" charset="0"/>
                           <a:cs typeface="Courier New" panose="02070309020205020404" pitchFamily="49" charset="0"/>
                         </a:rPr>
-                        <a:t>] &gt; 10, Sales[Discount] &gt; 0.1)</a:t>
+                        <a:t>] &gt; 10</a:t>
+                      </a:r>
+                      <a:r>
+                        <a:rPr lang="en-US" sz="1200" u="none" strike="noStrike">
+                          <a:effectLst/>
+                          <a:latin typeface="Courier New" panose="02070309020205020404" pitchFamily="49" charset="0"/>
+                          <a:cs typeface="Courier New" panose="02070309020205020404" pitchFamily="49" charset="0"/>
+                        </a:rPr>
+                        <a:t>, </a:t>
+                      </a:r>
+                      <a:r>
+                        <a:rPr lang="en-US" sz="1200" u="none" strike="noStrike" smtClean="0">
+                          <a:effectLst/>
+                          <a:latin typeface="Courier New" panose="02070309020205020404" pitchFamily="49" charset="0"/>
+                          <a:cs typeface="Courier New" panose="02070309020205020404" pitchFamily="49" charset="0"/>
+                        </a:rPr>
+                        <a:t>Sales[Discount</a:t>
+                      </a:r>
+                      <a:r>
+                        <a:rPr lang="en-US" sz="1200" u="none" strike="noStrike" dirty="0">
+                          <a:effectLst/>
+                          <a:latin typeface="Courier New" panose="02070309020205020404" pitchFamily="49" charset="0"/>
+                          <a:cs typeface="Courier New" panose="02070309020205020404" pitchFamily="49" charset="0"/>
+                        </a:rPr>
+                        <a:t>] &gt; 0.1)</a:t>
                       </a:r>
                       <a:endParaRPr lang="en-US" sz="1200" b="0" i="0" u="none" strike="noStrike" dirty="0">
                         <a:solidFill>
@@ -16937,7 +17348,7 @@
                     <a:p>
                       <a:pPr algn="l" fontAlgn="b"/>
                       <a:r>
-                        <a:rPr lang="en-US" sz="1200" u="none" strike="noStrike" baseline="0" dirty="0" smtClean="0">
+                        <a:rPr lang="en-US" sz="1200" u="none" strike="noStrike" baseline="0" smtClean="0">
                           <a:effectLst/>
                           <a:latin typeface="Courier New" panose="02070309020205020404" pitchFamily="49" charset="0"/>
                           <a:cs typeface="Courier New" panose="02070309020205020404" pitchFamily="49" charset="0"/>
@@ -16945,7 +17356,7 @@
                         <a:t> </a:t>
                       </a:r>
                       <a:r>
-                        <a:rPr lang="en-US" sz="1200" u="none" strike="noStrike" dirty="0" smtClean="0">
+                        <a:rPr lang="en-US" sz="1200" u="none" strike="noStrike" smtClean="0">
                           <a:effectLst/>
                           <a:latin typeface="Courier New" panose="02070309020205020404" pitchFamily="49" charset="0"/>
                           <a:cs typeface="Courier New" panose="02070309020205020404" pitchFamily="49" charset="0"/>
@@ -17012,7 +17423,7 @@
                     <a:p>
                       <a:pPr algn="l" fontAlgn="b"/>
                       <a:r>
-                        <a:rPr lang="en-US" sz="1200" u="none" strike="noStrike" baseline="0" dirty="0" smtClean="0">
+                        <a:rPr lang="en-US" sz="1200" u="none" strike="noStrike" baseline="0" smtClean="0">
                           <a:effectLst/>
                           <a:latin typeface="Courier New" panose="02070309020205020404" pitchFamily="49" charset="0"/>
                           <a:cs typeface="Courier New" panose="02070309020205020404" pitchFamily="49" charset="0"/>
@@ -17020,20 +17431,12 @@
                         <a:t> </a:t>
                       </a:r>
                       <a:r>
-                        <a:rPr lang="en-US" sz="1200" u="none" strike="noStrike" dirty="0" smtClean="0">
+                        <a:rPr lang="en-US" sz="1200" u="none" strike="noStrike" smtClean="0">
                           <a:effectLst/>
                           <a:latin typeface="Courier New" panose="02070309020205020404" pitchFamily="49" charset="0"/>
                           <a:cs typeface="Courier New" panose="02070309020205020404" pitchFamily="49" charset="0"/>
                         </a:rPr>
-                        <a:t>SWITCH(Sales[</a:t>
-                      </a:r>
-                      <a:r>
-                        <a:rPr lang="en-US" sz="1200" u="none" strike="noStrike" dirty="0" err="1" smtClean="0">
-                          <a:effectLst/>
-                          <a:latin typeface="Courier New" panose="02070309020205020404" pitchFamily="49" charset="0"/>
-                          <a:cs typeface="Courier New" panose="02070309020205020404" pitchFamily="49" charset="0"/>
-                        </a:rPr>
-                        <a:t>RegionCode</a:t>
+                        <a:t>SWITCH(Sales[RegionCode</a:t>
                       </a:r>
                       <a:r>
                         <a:rPr lang="en-US" sz="1200" u="none" strike="noStrike" dirty="0">
@@ -17095,7 +17498,7 @@
                     <a:p>
                       <a:pPr algn="l" fontAlgn="b"/>
                       <a:r>
-                        <a:rPr lang="en-IN" sz="1200" u="none" strike="noStrike" baseline="0" dirty="0" smtClean="0">
+                        <a:rPr lang="en-IN" sz="1200" u="none" strike="noStrike" baseline="0" smtClean="0">
                           <a:effectLst/>
                           <a:latin typeface="Courier New" panose="02070309020205020404" pitchFamily="49" charset="0"/>
                           <a:cs typeface="Courier New" panose="02070309020205020404" pitchFamily="49" charset="0"/>
@@ -17103,7 +17506,7 @@
                         <a:t> </a:t>
                       </a:r>
                       <a:r>
-                        <a:rPr lang="en-IN" sz="1200" u="none" strike="noStrike" dirty="0" smtClean="0">
+                        <a:rPr lang="en-IN" sz="1200" u="none" strike="noStrike" smtClean="0">
                           <a:effectLst/>
                           <a:latin typeface="Courier New" panose="02070309020205020404" pitchFamily="49" charset="0"/>
                           <a:cs typeface="Courier New" panose="02070309020205020404" pitchFamily="49" charset="0"/>
@@ -17116,7 +17519,31 @@
                           <a:latin typeface="Courier New" panose="02070309020205020404" pitchFamily="49" charset="0"/>
                           <a:cs typeface="Courier New" panose="02070309020205020404" pitchFamily="49" charset="0"/>
                         </a:rPr>
-                        <a:t>] / Sales[Units], 0)</a:t>
+                        <a:t>] </a:t>
+                      </a:r>
+                      <a:r>
+                        <a:rPr lang="en-IN" sz="1200" u="none" strike="noStrike">
+                          <a:effectLst/>
+                          <a:latin typeface="Courier New" panose="02070309020205020404" pitchFamily="49" charset="0"/>
+                          <a:cs typeface="Courier New" panose="02070309020205020404" pitchFamily="49" charset="0"/>
+                        </a:rPr>
+                        <a:t>/ </a:t>
+                      </a:r>
+                      <a:r>
+                        <a:rPr lang="en-IN" sz="1200" u="none" strike="noStrike" smtClean="0">
+                          <a:effectLst/>
+                          <a:latin typeface="Courier New" panose="02070309020205020404" pitchFamily="49" charset="0"/>
+                          <a:cs typeface="Courier New" panose="02070309020205020404" pitchFamily="49" charset="0"/>
+                        </a:rPr>
+                        <a:t>Sales[Units</a:t>
+                      </a:r>
+                      <a:r>
+                        <a:rPr lang="en-IN" sz="1200" u="none" strike="noStrike" dirty="0">
+                          <a:effectLst/>
+                          <a:latin typeface="Courier New" panose="02070309020205020404" pitchFamily="49" charset="0"/>
+                          <a:cs typeface="Courier New" panose="02070309020205020404" pitchFamily="49" charset="0"/>
+                        </a:rPr>
+                        <a:t>], 0)</a:t>
                       </a:r>
                       <a:endParaRPr lang="en-IN" sz="1200" b="0" i="0" u="none" strike="noStrike" dirty="0">
                         <a:solidFill>
@@ -17170,7 +17597,7 @@
                     <a:p>
                       <a:pPr algn="l" fontAlgn="b"/>
                       <a:r>
-                        <a:rPr lang="en-US" sz="1200" u="none" strike="noStrike" baseline="0" dirty="0" smtClean="0">
+                        <a:rPr lang="en-US" sz="1200" u="none" strike="noStrike" baseline="0" smtClean="0">
                           <a:effectLst/>
                           <a:latin typeface="Courier New" panose="02070309020205020404" pitchFamily="49" charset="0"/>
                           <a:cs typeface="Courier New" panose="02070309020205020404" pitchFamily="49" charset="0"/>
@@ -17178,36 +17605,28 @@
                         <a:t> </a:t>
                       </a:r>
                       <a:r>
-                        <a:rPr lang="en-US" sz="1200" u="none" strike="noStrike" dirty="0" smtClean="0">
+                        <a:rPr lang="en-US" sz="1200" u="none" strike="noStrike" smtClean="0">
                           <a:effectLst/>
                           <a:latin typeface="Courier New" panose="02070309020205020404" pitchFamily="49" charset="0"/>
                           <a:cs typeface="Courier New" panose="02070309020205020404" pitchFamily="49" charset="0"/>
                         </a:rPr>
-                        <a:t>COALESCE(Sales[</a:t>
+                        <a:t>COALESCE(Sales[AltPhone</a:t>
                       </a:r>
                       <a:r>
-                        <a:rPr lang="en-US" sz="1200" u="none" strike="noStrike" dirty="0" err="1" smtClean="0">
+                        <a:rPr lang="en-US" sz="1200" u="none" strike="noStrike">
                           <a:effectLst/>
                           <a:latin typeface="Courier New" panose="02070309020205020404" pitchFamily="49" charset="0"/>
                           <a:cs typeface="Courier New" panose="02070309020205020404" pitchFamily="49" charset="0"/>
                         </a:rPr>
-                        <a:t>AltPhone</a:t>
+                        <a:t>], </a:t>
                       </a:r>
                       <a:r>
-                        <a:rPr lang="en-US" sz="1200" u="none" strike="noStrike" dirty="0">
+                        <a:rPr lang="en-US" sz="1200" u="none" strike="noStrike" smtClean="0">
                           <a:effectLst/>
                           <a:latin typeface="Courier New" panose="02070309020205020404" pitchFamily="49" charset="0"/>
                           <a:cs typeface="Courier New" panose="02070309020205020404" pitchFamily="49" charset="0"/>
                         </a:rPr>
-                        <a:t>], Sales[</a:t>
-                      </a:r>
-                      <a:r>
-                        <a:rPr lang="en-US" sz="1200" u="none" strike="noStrike" dirty="0" err="1">
-                          <a:effectLst/>
-                          <a:latin typeface="Courier New" panose="02070309020205020404" pitchFamily="49" charset="0"/>
-                          <a:cs typeface="Courier New" panose="02070309020205020404" pitchFamily="49" charset="0"/>
-                        </a:rPr>
-                        <a:t>HomePhone</a:t>
+                        <a:t>Sales[HomePhone</a:t>
                       </a:r>
                       <a:r>
                         <a:rPr lang="en-US" sz="1200" u="none" strike="noStrike" dirty="0">
@@ -17574,232 +17993,848 @@
           <a:chExt cx="0" cy="0"/>
         </a:xfrm>
       </p:grpSpPr>
-      <p:sp>
-        <p:nvSpPr>
-          <p:cNvPr id="2" name="Rectangle 1"/>
-          <p:cNvSpPr/>
-          <p:nvPr/>
-        </p:nvSpPr>
-        <p:spPr>
-          <a:xfrm>
-            <a:off x="428262" y="942559"/>
-            <a:ext cx="10532962" cy="2970044"/>
-          </a:xfrm>
-          <a:prstGeom prst="rect">
-            <a:avLst/>
-          </a:prstGeom>
-        </p:spPr>
-        <p:txBody>
-          <a:bodyPr wrap="square">
-            <a:spAutoFit/>
-          </a:bodyPr>
-          <a:lstStyle/>
-          <a:p>
-            <a:r>
-              <a:rPr lang="en-IN" sz="1700" dirty="0">
-                <a:latin typeface="Courier New" panose="02070309020205020404" pitchFamily="49" charset="0"/>
-                <a:cs typeface="Courier New" panose="02070309020205020404" pitchFamily="49" charset="0"/>
-              </a:rPr>
-              <a:t>IF</a:t>
-            </a:r>
-          </a:p>
-          <a:p>
-            <a:r>
-              <a:rPr lang="en-IN" sz="1700" dirty="0">
-                <a:latin typeface="Courier New" panose="02070309020205020404" pitchFamily="49" charset="0"/>
-                <a:cs typeface="Courier New" panose="02070309020205020404" pitchFamily="49" charset="0"/>
-              </a:rPr>
-              <a:t>Category =IF(Data[Units Sold] &lt; 5000, "Small", "Large")</a:t>
-            </a:r>
-          </a:p>
-          <a:p>
-            <a:endParaRPr lang="en-IN" sz="1700" dirty="0" smtClean="0">
-              <a:latin typeface="Courier New" panose="02070309020205020404" pitchFamily="49" charset="0"/>
-              <a:cs typeface="Courier New" panose="02070309020205020404" pitchFamily="49" charset="0"/>
-            </a:endParaRPr>
-          </a:p>
-          <a:p>
-            <a:endParaRPr lang="en-IN" sz="1700" dirty="0">
-              <a:latin typeface="Courier New" panose="02070309020205020404" pitchFamily="49" charset="0"/>
-              <a:cs typeface="Courier New" panose="02070309020205020404" pitchFamily="49" charset="0"/>
-            </a:endParaRPr>
-          </a:p>
-          <a:p>
-            <a:r>
-              <a:rPr lang="en-IN" sz="1700" dirty="0" err="1" smtClean="0">
-                <a:latin typeface="Courier New" panose="02070309020205020404" pitchFamily="49" charset="0"/>
-                <a:cs typeface="Courier New" panose="02070309020205020404" pitchFamily="49" charset="0"/>
-              </a:rPr>
-              <a:t>High_Value_Sales</a:t>
-            </a:r>
-            <a:r>
-              <a:rPr lang="en-IN" sz="1700" dirty="0" smtClean="0">
-                <a:latin typeface="Courier New" panose="02070309020205020404" pitchFamily="49" charset="0"/>
-                <a:cs typeface="Courier New" panose="02070309020205020404" pitchFamily="49" charset="0"/>
-              </a:rPr>
-              <a:t> 	= </a:t>
-            </a:r>
-            <a:r>
-              <a:rPr lang="en-IN" sz="1700" dirty="0">
-                <a:latin typeface="Courier New" panose="02070309020205020404" pitchFamily="49" charset="0"/>
-                <a:cs typeface="Courier New" panose="02070309020205020404" pitchFamily="49" charset="0"/>
-              </a:rPr>
-              <a:t>CALCULATE(SUM(Sales[Amount]), Sales[Amount] &gt; 1000)</a:t>
-            </a:r>
-          </a:p>
-          <a:p>
-            <a:r>
-              <a:rPr lang="en-IN" sz="1700" dirty="0" err="1">
-                <a:latin typeface="Courier New" panose="02070309020205020404" pitchFamily="49" charset="0"/>
-                <a:cs typeface="Courier New" panose="02070309020205020404" pitchFamily="49" charset="0"/>
-              </a:rPr>
-              <a:t>Less_Value_Sales</a:t>
-            </a:r>
-            <a:r>
-              <a:rPr lang="en-IN" sz="1700" dirty="0">
-                <a:latin typeface="Courier New" panose="02070309020205020404" pitchFamily="49" charset="0"/>
-                <a:cs typeface="Courier New" panose="02070309020205020404" pitchFamily="49" charset="0"/>
-              </a:rPr>
-              <a:t> </a:t>
-            </a:r>
-            <a:r>
-              <a:rPr lang="en-IN" sz="1700" dirty="0" smtClean="0">
-                <a:latin typeface="Courier New" panose="02070309020205020404" pitchFamily="49" charset="0"/>
-                <a:cs typeface="Courier New" panose="02070309020205020404" pitchFamily="49" charset="0"/>
-              </a:rPr>
-              <a:t>	= </a:t>
-            </a:r>
-            <a:r>
-              <a:rPr lang="en-IN" sz="1700" dirty="0">
-                <a:latin typeface="Courier New" panose="02070309020205020404" pitchFamily="49" charset="0"/>
-                <a:cs typeface="Courier New" panose="02070309020205020404" pitchFamily="49" charset="0"/>
-              </a:rPr>
-              <a:t>CALCULATE(SUM(Sales[Amount]), Sales[Amount] &lt; 1000</a:t>
-            </a:r>
-            <a:r>
-              <a:rPr lang="en-IN" sz="1700" dirty="0" smtClean="0">
-                <a:latin typeface="Courier New" panose="02070309020205020404" pitchFamily="49" charset="0"/>
-                <a:cs typeface="Courier New" panose="02070309020205020404" pitchFamily="49" charset="0"/>
-              </a:rPr>
-              <a:t>)</a:t>
-            </a:r>
-          </a:p>
-          <a:p>
-            <a:r>
-              <a:rPr lang="en-US" sz="1700" dirty="0">
-                <a:latin typeface="Courier New" panose="02070309020205020404" pitchFamily="49" charset="0"/>
-                <a:cs typeface="Courier New" panose="02070309020205020404" pitchFamily="49" charset="0"/>
-              </a:rPr>
-              <a:t>Category </a:t>
-            </a:r>
-            <a:r>
-              <a:rPr lang="en-US" sz="1700" dirty="0" smtClean="0">
-                <a:latin typeface="Courier New" panose="02070309020205020404" pitchFamily="49" charset="0"/>
-                <a:cs typeface="Courier New" panose="02070309020205020404" pitchFamily="49" charset="0"/>
-              </a:rPr>
-              <a:t>		= </a:t>
-            </a:r>
-            <a:r>
-              <a:rPr lang="en-US" sz="1700" dirty="0">
-                <a:latin typeface="Courier New" panose="02070309020205020404" pitchFamily="49" charset="0"/>
-                <a:cs typeface="Courier New" panose="02070309020205020404" pitchFamily="49" charset="0"/>
-              </a:rPr>
-              <a:t>IF(Data[Units Sold] &lt; 5000, "Small", "Large")</a:t>
-            </a:r>
-          </a:p>
-          <a:p>
-            <a:r>
-              <a:rPr lang="en-US" sz="1700" dirty="0">
-                <a:latin typeface="Courier New" panose="02070309020205020404" pitchFamily="49" charset="0"/>
-                <a:cs typeface="Courier New" panose="02070309020205020404" pitchFamily="49" charset="0"/>
-              </a:rPr>
-              <a:t>Category </a:t>
-            </a:r>
-            <a:r>
-              <a:rPr lang="en-US" sz="1700" dirty="0" smtClean="0">
-                <a:latin typeface="Courier New" panose="02070309020205020404" pitchFamily="49" charset="0"/>
-                <a:cs typeface="Courier New" panose="02070309020205020404" pitchFamily="49" charset="0"/>
-              </a:rPr>
-              <a:t>		= IF(</a:t>
-            </a:r>
-          </a:p>
-          <a:p>
-            <a:r>
-              <a:rPr lang="en-US" sz="1700" dirty="0">
-                <a:latin typeface="Courier New" panose="02070309020205020404" pitchFamily="49" charset="0"/>
-                <a:cs typeface="Courier New" panose="02070309020205020404" pitchFamily="49" charset="0"/>
-              </a:rPr>
-              <a:t>	</a:t>
-            </a:r>
-            <a:r>
-              <a:rPr lang="en-US" sz="1700" dirty="0" smtClean="0">
-                <a:latin typeface="Courier New" panose="02070309020205020404" pitchFamily="49" charset="0"/>
-                <a:cs typeface="Courier New" panose="02070309020205020404" pitchFamily="49" charset="0"/>
-              </a:rPr>
-              <a:t>			Data[Units </a:t>
-            </a:r>
-            <a:r>
-              <a:rPr lang="en-US" sz="1700" dirty="0">
-                <a:latin typeface="Courier New" panose="02070309020205020404" pitchFamily="49" charset="0"/>
-                <a:cs typeface="Courier New" panose="02070309020205020404" pitchFamily="49" charset="0"/>
-              </a:rPr>
-              <a:t>Sold] &lt; 5000</a:t>
-            </a:r>
-            <a:r>
-              <a:rPr lang="en-US" sz="1700" dirty="0" smtClean="0">
-                <a:latin typeface="Courier New" panose="02070309020205020404" pitchFamily="49" charset="0"/>
-                <a:cs typeface="Courier New" panose="02070309020205020404" pitchFamily="49" charset="0"/>
-              </a:rPr>
-              <a:t>,"</a:t>
-            </a:r>
-            <a:r>
-              <a:rPr lang="en-US" sz="1700" dirty="0">
-                <a:latin typeface="Courier New" panose="02070309020205020404" pitchFamily="49" charset="0"/>
-                <a:cs typeface="Courier New" panose="02070309020205020404" pitchFamily="49" charset="0"/>
-              </a:rPr>
-              <a:t>Small",</a:t>
-            </a:r>
-          </a:p>
-          <a:p>
-            <a:pPr lvl="7"/>
-            <a:r>
-              <a:rPr lang="en-US" sz="1700" dirty="0">
-                <a:latin typeface="Courier New" panose="02070309020205020404" pitchFamily="49" charset="0"/>
-                <a:cs typeface="Courier New" panose="02070309020205020404" pitchFamily="49" charset="0"/>
-              </a:rPr>
-              <a:t> </a:t>
-            </a:r>
-            <a:r>
-              <a:rPr lang="en-US" sz="1700" dirty="0" smtClean="0">
-                <a:latin typeface="Courier New" panose="02070309020205020404" pitchFamily="49" charset="0"/>
-                <a:cs typeface="Courier New" panose="02070309020205020404" pitchFamily="49" charset="0"/>
-              </a:rPr>
-              <a:t>	IF(Data[Units </a:t>
-            </a:r>
-            <a:r>
-              <a:rPr lang="en-US" sz="1700" dirty="0">
-                <a:latin typeface="Courier New" panose="02070309020205020404" pitchFamily="49" charset="0"/>
-                <a:cs typeface="Courier New" panose="02070309020205020404" pitchFamily="49" charset="0"/>
-              </a:rPr>
-              <a:t>Sold] &lt; 10000, "Medium", "Large")</a:t>
-            </a:r>
-          </a:p>
-          <a:p>
-            <a:pPr lvl="7"/>
-            <a:r>
-              <a:rPr lang="en-US" sz="1700" dirty="0">
-                <a:latin typeface="Courier New" panose="02070309020205020404" pitchFamily="49" charset="0"/>
-                <a:cs typeface="Courier New" panose="02070309020205020404" pitchFamily="49" charset="0"/>
-              </a:rPr>
-              <a:t>)</a:t>
-            </a:r>
-            <a:endParaRPr lang="en-IN" sz="1700" dirty="0">
-              <a:latin typeface="Courier New" panose="02070309020205020404" pitchFamily="49" charset="0"/>
-              <a:cs typeface="Courier New" panose="02070309020205020404" pitchFamily="49" charset="0"/>
-            </a:endParaRPr>
-          </a:p>
-        </p:txBody>
-      </p:sp>
+      <p:graphicFrame>
+        <p:nvGraphicFramePr>
+          <p:cNvPr id="2" name="Table 1"/>
+          <p:cNvGraphicFramePr>
+            <a:graphicFrameLocks noGrp="1"/>
+          </p:cNvGraphicFramePr>
+          <p:nvPr>
+            <p:extLst>
+              <p:ext uri="{D42A27DB-BD31-4B8C-83A1-F6EECF244321}">
+                <p14:modId xmlns:p14="http://schemas.microsoft.com/office/powerpoint/2010/main" val="2865355035"/>
+              </p:ext>
+            </p:extLst>
+          </p:nvPr>
+        </p:nvGraphicFramePr>
+        <p:xfrm>
+          <a:off x="175134" y="1795409"/>
+          <a:ext cx="11830053" cy="1925320"/>
+        </p:xfrm>
+        <a:graphic>
+          <a:graphicData uri="http://schemas.openxmlformats.org/drawingml/2006/table">
+            <a:tbl>
+              <a:tblPr>
+                <a:tableStyleId>{5FD0F851-EC5A-4D38-B0AD-8093EC10F338}</a:tableStyleId>
+              </a:tblPr>
+              <a:tblGrid>
+                <a:gridCol w="1816991">
+                  <a:extLst>
+                    <a:ext uri="{9D8B030D-6E8A-4147-A177-3AD203B41FA5}">
+                      <a16:colId xmlns:a16="http://schemas.microsoft.com/office/drawing/2014/main" val="2230006388"/>
+                    </a:ext>
+                  </a:extLst>
+                </a:gridCol>
+                <a:gridCol w="10013062">
+                  <a:extLst>
+                    <a:ext uri="{9D8B030D-6E8A-4147-A177-3AD203B41FA5}">
+                      <a16:colId xmlns:a16="http://schemas.microsoft.com/office/drawing/2014/main" val="229815961"/>
+                    </a:ext>
+                  </a:extLst>
+                </a:gridCol>
+              </a:tblGrid>
+              <a:tr h="211375">
+                <a:tc>
+                  <a:txBody>
+                    <a:bodyPr/>
+                    <a:lstStyle/>
+                    <a:p>
+                      <a:pPr algn="l" fontAlgn="b">
+                        <a:spcBef>
+                          <a:spcPts val="200"/>
+                        </a:spcBef>
+                      </a:pPr>
+                      <a:r>
+                        <a:rPr lang="en-IN" sz="1500" u="none" strike="noStrike" dirty="0" smtClean="0">
+                          <a:effectLst/>
+                          <a:latin typeface="Courier New" panose="02070309020205020404" pitchFamily="49" charset="0"/>
+                          <a:cs typeface="Courier New" panose="02070309020205020404" pitchFamily="49" charset="0"/>
+                        </a:rPr>
+                        <a:t>CALCULATE</a:t>
+                      </a:r>
+                      <a:endParaRPr lang="en-IN" sz="1500" b="1" i="0" u="none" strike="noStrike" dirty="0">
+                        <a:solidFill>
+                          <a:srgbClr val="000000"/>
+                        </a:solidFill>
+                        <a:effectLst/>
+                        <a:latin typeface="Courier New" panose="02070309020205020404" pitchFamily="49" charset="0"/>
+                        <a:cs typeface="Courier New" panose="02070309020205020404" pitchFamily="49" charset="0"/>
+                      </a:endParaRPr>
+                    </a:p>
+                  </a:txBody>
+                  <a:tcPr marL="7620" marR="7620" marT="7620" marB="0" anchor="b">
+                    <a:lnB w="12700" cap="flat" cmpd="sng" algn="ctr">
+                      <a:solidFill>
+                        <a:schemeClr val="tx1"/>
+                      </a:solidFill>
+                      <a:prstDash val="solid"/>
+                      <a:round/>
+                      <a:headEnd type="none" w="med" len="med"/>
+                      <a:tailEnd type="none" w="med" len="med"/>
+                    </a:lnB>
+                  </a:tcPr>
+                </a:tc>
+                <a:tc>
+                  <a:txBody>
+                    <a:bodyPr/>
+                    <a:lstStyle/>
+                    <a:p>
+                      <a:pPr algn="l" fontAlgn="b">
+                        <a:spcBef>
+                          <a:spcPts val="200"/>
+                        </a:spcBef>
+                      </a:pPr>
+                      <a:r>
+                        <a:rPr lang="en-IN" sz="1300" u="none" strike="noStrike" dirty="0" smtClean="0">
+                          <a:effectLst/>
+                          <a:latin typeface="Courier New" panose="02070309020205020404" pitchFamily="49" charset="0"/>
+                          <a:cs typeface="Courier New" panose="02070309020205020404" pitchFamily="49" charset="0"/>
+                        </a:rPr>
+                        <a:t> CALCULATE(SUM(Orders[Amount</a:t>
+                      </a:r>
+                      <a:r>
+                        <a:rPr lang="en-IN" sz="1300" u="none" strike="noStrike" dirty="0">
+                          <a:effectLst/>
+                          <a:latin typeface="Courier New" panose="02070309020205020404" pitchFamily="49" charset="0"/>
+                          <a:cs typeface="Courier New" panose="02070309020205020404" pitchFamily="49" charset="0"/>
+                        </a:rPr>
+                        <a:t>]), </a:t>
+                      </a:r>
+                      <a:r>
+                        <a:rPr lang="en-IN" sz="1300" u="none" strike="noStrike" dirty="0" smtClean="0">
+                          <a:effectLst/>
+                          <a:latin typeface="Courier New" panose="02070309020205020404" pitchFamily="49" charset="0"/>
+                          <a:cs typeface="Courier New" panose="02070309020205020404" pitchFamily="49" charset="0"/>
+                        </a:rPr>
+                        <a:t>Orders[Region</a:t>
+                      </a:r>
+                      <a:r>
+                        <a:rPr lang="en-IN" sz="1300" u="none" strike="noStrike" dirty="0">
+                          <a:effectLst/>
+                          <a:latin typeface="Courier New" panose="02070309020205020404" pitchFamily="49" charset="0"/>
+                          <a:cs typeface="Courier New" panose="02070309020205020404" pitchFamily="49" charset="0"/>
+                        </a:rPr>
+                        <a:t>] = "West")</a:t>
+                      </a:r>
+                      <a:endParaRPr lang="en-IN" sz="1300" b="0" i="0" u="none" strike="noStrike" dirty="0">
+                        <a:solidFill>
+                          <a:srgbClr val="000000"/>
+                        </a:solidFill>
+                        <a:effectLst/>
+                        <a:latin typeface="Courier New" panose="02070309020205020404" pitchFamily="49" charset="0"/>
+                        <a:cs typeface="Courier New" panose="02070309020205020404" pitchFamily="49" charset="0"/>
+                      </a:endParaRPr>
+                    </a:p>
+                  </a:txBody>
+                  <a:tcPr marL="7620" marR="7620" marT="7620" marB="0" anchor="b">
+                    <a:lnB w="12700" cap="flat" cmpd="sng" algn="ctr">
+                      <a:solidFill>
+                        <a:schemeClr val="tx1"/>
+                      </a:solidFill>
+                      <a:prstDash val="solid"/>
+                      <a:round/>
+                      <a:headEnd type="none" w="med" len="med"/>
+                      <a:tailEnd type="none" w="med" len="med"/>
+                    </a:lnB>
+                  </a:tcPr>
+                </a:tc>
+                <a:extLst>
+                  <a:ext uri="{0D108BD9-81ED-4DB2-BD59-A6C34878D82A}">
+                    <a16:rowId xmlns:a16="http://schemas.microsoft.com/office/drawing/2014/main" val="415163549"/>
+                  </a:ext>
+                </a:extLst>
+              </a:tr>
+              <a:tr h="211375">
+                <a:tc>
+                  <a:txBody>
+                    <a:bodyPr/>
+                    <a:lstStyle/>
+                    <a:p>
+                      <a:pPr algn="l" fontAlgn="b">
+                        <a:spcBef>
+                          <a:spcPts val="200"/>
+                        </a:spcBef>
+                      </a:pPr>
+                      <a:r>
+                        <a:rPr lang="en-IN" sz="1500" u="none" strike="noStrike" dirty="0" smtClean="0">
+                          <a:effectLst/>
+                          <a:latin typeface="Courier New" panose="02070309020205020404" pitchFamily="49" charset="0"/>
+                          <a:cs typeface="Courier New" panose="02070309020205020404" pitchFamily="49" charset="0"/>
+                        </a:rPr>
+                        <a:t>FILTER</a:t>
+                      </a:r>
+                    </a:p>
+                    <a:p>
+                      <a:pPr algn="l" fontAlgn="b">
+                        <a:spcBef>
+                          <a:spcPts val="200"/>
+                        </a:spcBef>
+                      </a:pPr>
+                      <a:endParaRPr lang="en-US" sz="1500" b="1" i="0" u="none" strike="noStrike" dirty="0" smtClean="0">
+                        <a:solidFill>
+                          <a:srgbClr val="000000"/>
+                        </a:solidFill>
+                        <a:effectLst/>
+                        <a:latin typeface="Courier New" panose="02070309020205020404" pitchFamily="49" charset="0"/>
+                        <a:cs typeface="Courier New" panose="02070309020205020404" pitchFamily="49" charset="0"/>
+                      </a:endParaRPr>
+                    </a:p>
+                    <a:p>
+                      <a:pPr algn="l" fontAlgn="b">
+                        <a:spcBef>
+                          <a:spcPts val="200"/>
+                        </a:spcBef>
+                      </a:pPr>
+                      <a:endParaRPr lang="en-IN" sz="1500" b="1" i="0" u="none" strike="noStrike" dirty="0">
+                        <a:solidFill>
+                          <a:srgbClr val="000000"/>
+                        </a:solidFill>
+                        <a:effectLst/>
+                        <a:latin typeface="Courier New" panose="02070309020205020404" pitchFamily="49" charset="0"/>
+                        <a:cs typeface="Courier New" panose="02070309020205020404" pitchFamily="49" charset="0"/>
+                      </a:endParaRPr>
+                    </a:p>
+                  </a:txBody>
+                  <a:tcPr marL="7620" marR="7620" marT="7620" marB="0" anchor="b">
+                    <a:lnT w="12700" cap="flat" cmpd="sng" algn="ctr">
+                      <a:solidFill>
+                        <a:schemeClr val="tx1"/>
+                      </a:solidFill>
+                      <a:prstDash val="solid"/>
+                      <a:round/>
+                      <a:headEnd type="none" w="med" len="med"/>
+                      <a:tailEnd type="none" w="med" len="med"/>
+                    </a:lnT>
+                    <a:lnB w="12700" cap="flat" cmpd="sng" algn="ctr">
+                      <a:solidFill>
+                        <a:schemeClr val="tx1"/>
+                      </a:solidFill>
+                      <a:prstDash val="solid"/>
+                      <a:round/>
+                      <a:headEnd type="none" w="med" len="med"/>
+                      <a:tailEnd type="none" w="med" len="med"/>
+                    </a:lnB>
+                  </a:tcPr>
+                </a:tc>
+                <a:tc>
+                  <a:txBody>
+                    <a:bodyPr/>
+                    <a:lstStyle/>
+                    <a:p>
+                      <a:pPr algn="l" fontAlgn="b">
+                        <a:spcBef>
+                          <a:spcPts val="200"/>
+                        </a:spcBef>
+                      </a:pPr>
+                      <a:r>
+                        <a:rPr lang="en-IN" sz="1300" u="none" strike="noStrike" baseline="0" dirty="0" smtClean="0">
+                          <a:effectLst/>
+                          <a:latin typeface="Courier New" panose="02070309020205020404" pitchFamily="49" charset="0"/>
+                          <a:cs typeface="Courier New" panose="02070309020205020404" pitchFamily="49" charset="0"/>
+                        </a:rPr>
+                        <a:t> </a:t>
+                      </a:r>
+                      <a:r>
+                        <a:rPr lang="en-IN" sz="1300" u="none" strike="noStrike" dirty="0" smtClean="0">
+                          <a:effectLst/>
+                          <a:latin typeface="Courier New" panose="02070309020205020404" pitchFamily="49" charset="0"/>
+                          <a:cs typeface="Courier New" panose="02070309020205020404" pitchFamily="49" charset="0"/>
+                        </a:rPr>
+                        <a:t>FILTER(Orders, Orders[Amount</a:t>
+                      </a:r>
+                      <a:r>
+                        <a:rPr lang="en-IN" sz="1300" u="none" strike="noStrike" dirty="0">
+                          <a:effectLst/>
+                          <a:latin typeface="Courier New" panose="02070309020205020404" pitchFamily="49" charset="0"/>
+                          <a:cs typeface="Courier New" panose="02070309020205020404" pitchFamily="49" charset="0"/>
+                        </a:rPr>
+                        <a:t>] &gt; 1000</a:t>
+                      </a:r>
+                      <a:r>
+                        <a:rPr lang="en-IN" sz="1300" u="none" strike="noStrike" dirty="0" smtClean="0">
+                          <a:effectLst/>
+                          <a:latin typeface="Courier New" panose="02070309020205020404" pitchFamily="49" charset="0"/>
+                          <a:cs typeface="Courier New" panose="02070309020205020404" pitchFamily="49" charset="0"/>
+                        </a:rPr>
+                        <a:t>)</a:t>
+                      </a:r>
+                    </a:p>
+                    <a:p>
+                      <a:pPr algn="l" fontAlgn="b">
+                        <a:spcBef>
+                          <a:spcPts val="200"/>
+                        </a:spcBef>
+                      </a:pPr>
+                      <a:r>
+                        <a:rPr lang="en-IN" sz="1300" u="none" strike="noStrike" dirty="0" smtClean="0">
+                          <a:effectLst/>
+                          <a:latin typeface="Courier New" panose="02070309020205020404" pitchFamily="49" charset="0"/>
+                          <a:cs typeface="Courier New" panose="02070309020205020404" pitchFamily="49" charset="0"/>
+                        </a:rPr>
+                        <a:t> FILTER(Orders, Orders[Category] = “</a:t>
+                      </a:r>
+                      <a:r>
+                        <a:rPr lang="en-IN" sz="1300" u="none" strike="noStrike" dirty="0" err="1" smtClean="0">
+                          <a:effectLst/>
+                          <a:latin typeface="Courier New" panose="02070309020205020404" pitchFamily="49" charset="0"/>
+                          <a:cs typeface="Courier New" panose="02070309020205020404" pitchFamily="49" charset="0"/>
+                        </a:rPr>
+                        <a:t>Furntiture</a:t>
+                      </a:r>
+                      <a:r>
+                        <a:rPr lang="en-IN" sz="1300" u="none" strike="noStrike" dirty="0" smtClean="0">
+                          <a:effectLst/>
+                          <a:latin typeface="Courier New" panose="02070309020205020404" pitchFamily="49" charset="0"/>
+                          <a:cs typeface="Courier New" panose="02070309020205020404" pitchFamily="49" charset="0"/>
+                        </a:rPr>
+                        <a:t>”)</a:t>
+                      </a:r>
+                    </a:p>
+                    <a:p>
+                      <a:pPr algn="l" fontAlgn="b">
+                        <a:spcBef>
+                          <a:spcPts val="200"/>
+                        </a:spcBef>
+                      </a:pPr>
+                      <a:endParaRPr lang="en-IN" sz="1300" b="0" i="0" u="none" strike="noStrike" dirty="0">
+                        <a:solidFill>
+                          <a:srgbClr val="000000"/>
+                        </a:solidFill>
+                        <a:effectLst/>
+                        <a:latin typeface="Courier New" panose="02070309020205020404" pitchFamily="49" charset="0"/>
+                        <a:cs typeface="Courier New" panose="02070309020205020404" pitchFamily="49" charset="0"/>
+                      </a:endParaRPr>
+                    </a:p>
+                  </a:txBody>
+                  <a:tcPr marL="7620" marR="7620" marT="7620" marB="0" anchor="b">
+                    <a:lnT w="12700" cap="flat" cmpd="sng" algn="ctr">
+                      <a:solidFill>
+                        <a:schemeClr val="tx1"/>
+                      </a:solidFill>
+                      <a:prstDash val="solid"/>
+                      <a:round/>
+                      <a:headEnd type="none" w="med" len="med"/>
+                      <a:tailEnd type="none" w="med" len="med"/>
+                    </a:lnT>
+                    <a:lnB w="12700" cap="flat" cmpd="sng" algn="ctr">
+                      <a:solidFill>
+                        <a:schemeClr val="tx1"/>
+                      </a:solidFill>
+                      <a:prstDash val="solid"/>
+                      <a:round/>
+                      <a:headEnd type="none" w="med" len="med"/>
+                      <a:tailEnd type="none" w="med" len="med"/>
+                    </a:lnB>
+                  </a:tcPr>
+                </a:tc>
+                <a:extLst>
+                  <a:ext uri="{0D108BD9-81ED-4DB2-BD59-A6C34878D82A}">
+                    <a16:rowId xmlns:a16="http://schemas.microsoft.com/office/drawing/2014/main" val="3517229111"/>
+                  </a:ext>
+                </a:extLst>
+              </a:tr>
+              <a:tr h="211375">
+                <a:tc>
+                  <a:txBody>
+                    <a:bodyPr/>
+                    <a:lstStyle/>
+                    <a:p>
+                      <a:pPr algn="l" fontAlgn="b">
+                        <a:spcBef>
+                          <a:spcPts val="200"/>
+                        </a:spcBef>
+                      </a:pPr>
+                      <a:r>
+                        <a:rPr lang="en-IN" sz="1500" u="none" strike="noStrike" dirty="0">
+                          <a:effectLst/>
+                          <a:latin typeface="Courier New" panose="02070309020205020404" pitchFamily="49" charset="0"/>
+                          <a:cs typeface="Courier New" panose="02070309020205020404" pitchFamily="49" charset="0"/>
+                        </a:rPr>
+                        <a:t>ALL</a:t>
+                      </a:r>
+                      <a:endParaRPr lang="en-IN" sz="1500" b="1" i="0" u="none" strike="noStrike" dirty="0">
+                        <a:solidFill>
+                          <a:srgbClr val="000000"/>
+                        </a:solidFill>
+                        <a:effectLst/>
+                        <a:latin typeface="Courier New" panose="02070309020205020404" pitchFamily="49" charset="0"/>
+                        <a:cs typeface="Courier New" panose="02070309020205020404" pitchFamily="49" charset="0"/>
+                      </a:endParaRPr>
+                    </a:p>
+                  </a:txBody>
+                  <a:tcPr marL="7620" marR="7620" marT="7620" marB="0" anchor="b">
+                    <a:lnT w="12700" cap="flat" cmpd="sng" algn="ctr">
+                      <a:solidFill>
+                        <a:schemeClr val="tx1"/>
+                      </a:solidFill>
+                      <a:prstDash val="solid"/>
+                      <a:round/>
+                      <a:headEnd type="none" w="med" len="med"/>
+                      <a:tailEnd type="none" w="med" len="med"/>
+                    </a:lnT>
+                    <a:lnB w="12700" cap="flat" cmpd="sng" algn="ctr">
+                      <a:solidFill>
+                        <a:schemeClr val="tx1"/>
+                      </a:solidFill>
+                      <a:prstDash val="solid"/>
+                      <a:round/>
+                      <a:headEnd type="none" w="med" len="med"/>
+                      <a:tailEnd type="none" w="med" len="med"/>
+                    </a:lnB>
+                  </a:tcPr>
+                </a:tc>
+                <a:tc>
+                  <a:txBody>
+                    <a:bodyPr/>
+                    <a:lstStyle/>
+                    <a:p>
+                      <a:pPr algn="l" fontAlgn="b">
+                        <a:spcBef>
+                          <a:spcPts val="200"/>
+                        </a:spcBef>
+                      </a:pPr>
+                      <a:r>
+                        <a:rPr lang="en-IN" sz="1300" u="none" strike="noStrike" baseline="0" dirty="0" smtClean="0">
+                          <a:effectLst/>
+                          <a:latin typeface="Courier New" panose="02070309020205020404" pitchFamily="49" charset="0"/>
+                          <a:cs typeface="Courier New" panose="02070309020205020404" pitchFamily="49" charset="0"/>
+                        </a:rPr>
+                        <a:t> </a:t>
+                      </a:r>
+                      <a:r>
+                        <a:rPr lang="en-IN" sz="1300" u="none" strike="noStrike" dirty="0" smtClean="0">
+                          <a:effectLst/>
+                          <a:latin typeface="Courier New" panose="02070309020205020404" pitchFamily="49" charset="0"/>
+                          <a:cs typeface="Courier New" panose="02070309020205020404" pitchFamily="49" charset="0"/>
+                        </a:rPr>
+                        <a:t>SUM(Orders[Amount</a:t>
+                      </a:r>
+                      <a:r>
+                        <a:rPr lang="en-IN" sz="1300" u="none" strike="noStrike" dirty="0">
+                          <a:effectLst/>
+                          <a:latin typeface="Courier New" panose="02070309020205020404" pitchFamily="49" charset="0"/>
+                          <a:cs typeface="Courier New" panose="02070309020205020404" pitchFamily="49" charset="0"/>
+                        </a:rPr>
+                        <a:t>]) / </a:t>
+                      </a:r>
+                      <a:r>
+                        <a:rPr lang="en-IN" sz="1300" u="none" strike="noStrike" dirty="0" smtClean="0">
+                          <a:effectLst/>
+                          <a:latin typeface="Courier New" panose="02070309020205020404" pitchFamily="49" charset="0"/>
+                          <a:cs typeface="Courier New" panose="02070309020205020404" pitchFamily="49" charset="0"/>
+                        </a:rPr>
+                        <a:t>CALCULATE(SUM(Orders[Amount</a:t>
+                      </a:r>
+                      <a:r>
+                        <a:rPr lang="en-IN" sz="1300" u="none" strike="noStrike" dirty="0">
+                          <a:effectLst/>
+                          <a:latin typeface="Courier New" panose="02070309020205020404" pitchFamily="49" charset="0"/>
+                          <a:cs typeface="Courier New" panose="02070309020205020404" pitchFamily="49" charset="0"/>
+                        </a:rPr>
+                        <a:t>]), </a:t>
+                      </a:r>
+                      <a:r>
+                        <a:rPr lang="en-IN" sz="1300" u="none" strike="noStrike" dirty="0" smtClean="0">
+                          <a:effectLst/>
+                          <a:latin typeface="Courier New" panose="02070309020205020404" pitchFamily="49" charset="0"/>
+                          <a:cs typeface="Courier New" panose="02070309020205020404" pitchFamily="49" charset="0"/>
+                        </a:rPr>
+                        <a:t>ALL(Sales))</a:t>
+                      </a:r>
+                      <a:endParaRPr lang="en-IN" sz="1300" b="0" i="0" u="none" strike="noStrike" dirty="0">
+                        <a:solidFill>
+                          <a:srgbClr val="000000"/>
+                        </a:solidFill>
+                        <a:effectLst/>
+                        <a:latin typeface="Courier New" panose="02070309020205020404" pitchFamily="49" charset="0"/>
+                        <a:cs typeface="Courier New" panose="02070309020205020404" pitchFamily="49" charset="0"/>
+                      </a:endParaRPr>
+                    </a:p>
+                  </a:txBody>
+                  <a:tcPr marL="7620" marR="7620" marT="7620" marB="0" anchor="b">
+                    <a:lnT w="12700" cap="flat" cmpd="sng" algn="ctr">
+                      <a:solidFill>
+                        <a:schemeClr val="tx1"/>
+                      </a:solidFill>
+                      <a:prstDash val="solid"/>
+                      <a:round/>
+                      <a:headEnd type="none" w="med" len="med"/>
+                      <a:tailEnd type="none" w="med" len="med"/>
+                    </a:lnT>
+                    <a:lnB w="12700" cap="flat" cmpd="sng" algn="ctr">
+                      <a:solidFill>
+                        <a:schemeClr val="tx1"/>
+                      </a:solidFill>
+                      <a:prstDash val="solid"/>
+                      <a:round/>
+                      <a:headEnd type="none" w="med" len="med"/>
+                      <a:tailEnd type="none" w="med" len="med"/>
+                    </a:lnB>
+                  </a:tcPr>
+                </a:tc>
+                <a:extLst>
+                  <a:ext uri="{0D108BD9-81ED-4DB2-BD59-A6C34878D82A}">
+                    <a16:rowId xmlns:a16="http://schemas.microsoft.com/office/drawing/2014/main" val="302581001"/>
+                  </a:ext>
+                </a:extLst>
+              </a:tr>
+              <a:tr h="211375">
+                <a:tc>
+                  <a:txBody>
+                    <a:bodyPr/>
+                    <a:lstStyle/>
+                    <a:p>
+                      <a:pPr algn="l" fontAlgn="b">
+                        <a:spcBef>
+                          <a:spcPts val="200"/>
+                        </a:spcBef>
+                      </a:pPr>
+                      <a:r>
+                        <a:rPr lang="en-IN" sz="1500" u="none" strike="noStrike" dirty="0">
+                          <a:effectLst/>
+                          <a:latin typeface="Courier New" panose="02070309020205020404" pitchFamily="49" charset="0"/>
+                          <a:cs typeface="Courier New" panose="02070309020205020404" pitchFamily="49" charset="0"/>
+                        </a:rPr>
+                        <a:t>ALLEXCEPT</a:t>
+                      </a:r>
+                      <a:endParaRPr lang="en-IN" sz="1500" b="1" i="0" u="none" strike="noStrike" dirty="0">
+                        <a:solidFill>
+                          <a:srgbClr val="000000"/>
+                        </a:solidFill>
+                        <a:effectLst/>
+                        <a:latin typeface="Courier New" panose="02070309020205020404" pitchFamily="49" charset="0"/>
+                        <a:cs typeface="Courier New" panose="02070309020205020404" pitchFamily="49" charset="0"/>
+                      </a:endParaRPr>
+                    </a:p>
+                  </a:txBody>
+                  <a:tcPr marL="7620" marR="7620" marT="7620" marB="0" anchor="b">
+                    <a:lnT w="12700" cap="flat" cmpd="sng" algn="ctr">
+                      <a:solidFill>
+                        <a:schemeClr val="tx1"/>
+                      </a:solidFill>
+                      <a:prstDash val="solid"/>
+                      <a:round/>
+                      <a:headEnd type="none" w="med" len="med"/>
+                      <a:tailEnd type="none" w="med" len="med"/>
+                    </a:lnT>
+                    <a:lnB w="12700" cap="flat" cmpd="sng" algn="ctr">
+                      <a:solidFill>
+                        <a:schemeClr val="tx1"/>
+                      </a:solidFill>
+                      <a:prstDash val="solid"/>
+                      <a:round/>
+                      <a:headEnd type="none" w="med" len="med"/>
+                      <a:tailEnd type="none" w="med" len="med"/>
+                    </a:lnB>
+                  </a:tcPr>
+                </a:tc>
+                <a:tc>
+                  <a:txBody>
+                    <a:bodyPr/>
+                    <a:lstStyle/>
+                    <a:p>
+                      <a:pPr algn="l" fontAlgn="b">
+                        <a:spcBef>
+                          <a:spcPts val="200"/>
+                        </a:spcBef>
+                      </a:pPr>
+                      <a:r>
+                        <a:rPr lang="en-IN" sz="1300" u="none" strike="noStrike" baseline="0" dirty="0" smtClean="0">
+                          <a:effectLst/>
+                          <a:latin typeface="Courier New" panose="02070309020205020404" pitchFamily="49" charset="0"/>
+                          <a:cs typeface="Courier New" panose="02070309020205020404" pitchFamily="49" charset="0"/>
+                        </a:rPr>
+                        <a:t> </a:t>
+                      </a:r>
+                      <a:r>
+                        <a:rPr lang="en-IN" sz="1300" u="none" strike="noStrike" dirty="0" smtClean="0">
+                          <a:effectLst/>
+                          <a:latin typeface="Courier New" panose="02070309020205020404" pitchFamily="49" charset="0"/>
+                          <a:cs typeface="Courier New" panose="02070309020205020404" pitchFamily="49" charset="0"/>
+                        </a:rPr>
+                        <a:t>CALCULATE(SUM(Orders[Amount</a:t>
+                      </a:r>
+                      <a:r>
+                        <a:rPr lang="en-IN" sz="1300" u="none" strike="noStrike" dirty="0">
+                          <a:effectLst/>
+                          <a:latin typeface="Courier New" panose="02070309020205020404" pitchFamily="49" charset="0"/>
+                          <a:cs typeface="Courier New" panose="02070309020205020404" pitchFamily="49" charset="0"/>
+                        </a:rPr>
+                        <a:t>]), ALLEXCEPT(Geography, Geography[State]))</a:t>
+                      </a:r>
+                      <a:endParaRPr lang="en-IN" sz="1300" b="0" i="0" u="none" strike="noStrike" dirty="0">
+                        <a:solidFill>
+                          <a:srgbClr val="000000"/>
+                        </a:solidFill>
+                        <a:effectLst/>
+                        <a:latin typeface="Courier New" panose="02070309020205020404" pitchFamily="49" charset="0"/>
+                        <a:cs typeface="Courier New" panose="02070309020205020404" pitchFamily="49" charset="0"/>
+                      </a:endParaRPr>
+                    </a:p>
+                  </a:txBody>
+                  <a:tcPr marL="7620" marR="7620" marT="7620" marB="0" anchor="b">
+                    <a:lnT w="12700" cap="flat" cmpd="sng" algn="ctr">
+                      <a:solidFill>
+                        <a:schemeClr val="tx1"/>
+                      </a:solidFill>
+                      <a:prstDash val="solid"/>
+                      <a:round/>
+                      <a:headEnd type="none" w="med" len="med"/>
+                      <a:tailEnd type="none" w="med" len="med"/>
+                    </a:lnT>
+                    <a:lnB w="12700" cap="flat" cmpd="sng" algn="ctr">
+                      <a:solidFill>
+                        <a:schemeClr val="tx1"/>
+                      </a:solidFill>
+                      <a:prstDash val="solid"/>
+                      <a:round/>
+                      <a:headEnd type="none" w="med" len="med"/>
+                      <a:tailEnd type="none" w="med" len="med"/>
+                    </a:lnB>
+                  </a:tcPr>
+                </a:tc>
+                <a:extLst>
+                  <a:ext uri="{0D108BD9-81ED-4DB2-BD59-A6C34878D82A}">
+                    <a16:rowId xmlns:a16="http://schemas.microsoft.com/office/drawing/2014/main" val="1468910001"/>
+                  </a:ext>
+                </a:extLst>
+              </a:tr>
+              <a:tr h="211375">
+                <a:tc>
+                  <a:txBody>
+                    <a:bodyPr/>
+                    <a:lstStyle/>
+                    <a:p>
+                      <a:pPr algn="l" fontAlgn="b">
+                        <a:spcBef>
+                          <a:spcPts val="200"/>
+                        </a:spcBef>
+                      </a:pPr>
+                      <a:r>
+                        <a:rPr lang="en-IN" sz="1500" u="none" strike="noStrike" dirty="0">
+                          <a:effectLst/>
+                          <a:latin typeface="Courier New" panose="02070309020205020404" pitchFamily="49" charset="0"/>
+                          <a:cs typeface="Courier New" panose="02070309020205020404" pitchFamily="49" charset="0"/>
+                        </a:rPr>
+                        <a:t>ALLSELECTED</a:t>
+                      </a:r>
+                      <a:endParaRPr lang="en-IN" sz="1500" b="1" i="0" u="none" strike="noStrike" dirty="0">
+                        <a:solidFill>
+                          <a:srgbClr val="000000"/>
+                        </a:solidFill>
+                        <a:effectLst/>
+                        <a:latin typeface="Courier New" panose="02070309020205020404" pitchFamily="49" charset="0"/>
+                        <a:cs typeface="Courier New" panose="02070309020205020404" pitchFamily="49" charset="0"/>
+                      </a:endParaRPr>
+                    </a:p>
+                  </a:txBody>
+                  <a:tcPr marL="7620" marR="7620" marT="7620" marB="0" anchor="b">
+                    <a:lnT w="12700" cap="flat" cmpd="sng" algn="ctr">
+                      <a:solidFill>
+                        <a:schemeClr val="tx1"/>
+                      </a:solidFill>
+                      <a:prstDash val="solid"/>
+                      <a:round/>
+                      <a:headEnd type="none" w="med" len="med"/>
+                      <a:tailEnd type="none" w="med" len="med"/>
+                    </a:lnT>
+                    <a:lnB w="12700" cap="flat" cmpd="sng" algn="ctr">
+                      <a:solidFill>
+                        <a:schemeClr val="tx1"/>
+                      </a:solidFill>
+                      <a:prstDash val="solid"/>
+                      <a:round/>
+                      <a:headEnd type="none" w="med" len="med"/>
+                      <a:tailEnd type="none" w="med" len="med"/>
+                    </a:lnB>
+                  </a:tcPr>
+                </a:tc>
+                <a:tc>
+                  <a:txBody>
+                    <a:bodyPr/>
+                    <a:lstStyle/>
+                    <a:p>
+                      <a:pPr algn="l" fontAlgn="b">
+                        <a:spcBef>
+                          <a:spcPts val="200"/>
+                        </a:spcBef>
+                      </a:pPr>
+                      <a:r>
+                        <a:rPr lang="en-IN" sz="1300" u="none" strike="noStrike" baseline="0" dirty="0" smtClean="0">
+                          <a:effectLst/>
+                          <a:latin typeface="Courier New" panose="02070309020205020404" pitchFamily="49" charset="0"/>
+                          <a:cs typeface="Courier New" panose="02070309020205020404" pitchFamily="49" charset="0"/>
+                        </a:rPr>
+                        <a:t> </a:t>
+                      </a:r>
+                      <a:r>
+                        <a:rPr lang="en-IN" sz="1300" u="none" strike="noStrike" dirty="0" smtClean="0">
+                          <a:effectLst/>
+                          <a:latin typeface="Courier New" panose="02070309020205020404" pitchFamily="49" charset="0"/>
+                          <a:cs typeface="Courier New" panose="02070309020205020404" pitchFamily="49" charset="0"/>
+                        </a:rPr>
+                        <a:t>CALCULATE(SUM(Orders[Amount</a:t>
+                      </a:r>
+                      <a:r>
+                        <a:rPr lang="en-IN" sz="1300" u="none" strike="noStrike" dirty="0">
+                          <a:effectLst/>
+                          <a:latin typeface="Courier New" panose="02070309020205020404" pitchFamily="49" charset="0"/>
+                          <a:cs typeface="Courier New" panose="02070309020205020404" pitchFamily="49" charset="0"/>
+                        </a:rPr>
+                        <a:t>]), </a:t>
+                      </a:r>
+                      <a:r>
+                        <a:rPr lang="en-IN" sz="1300" u="none" strike="noStrike" dirty="0" smtClean="0">
+                          <a:effectLst/>
+                          <a:latin typeface="Courier New" panose="02070309020205020404" pitchFamily="49" charset="0"/>
+                          <a:cs typeface="Courier New" panose="02070309020205020404" pitchFamily="49" charset="0"/>
+                        </a:rPr>
+                        <a:t>ALLSELECTED(Orders))</a:t>
+                      </a:r>
+                      <a:endParaRPr lang="en-IN" sz="1300" b="0" i="0" u="none" strike="noStrike" dirty="0">
+                        <a:solidFill>
+                          <a:srgbClr val="000000"/>
+                        </a:solidFill>
+                        <a:effectLst/>
+                        <a:latin typeface="Courier New" panose="02070309020205020404" pitchFamily="49" charset="0"/>
+                        <a:cs typeface="Courier New" panose="02070309020205020404" pitchFamily="49" charset="0"/>
+                      </a:endParaRPr>
+                    </a:p>
+                  </a:txBody>
+                  <a:tcPr marL="7620" marR="7620" marT="7620" marB="0" anchor="b">
+                    <a:lnT w="12700" cap="flat" cmpd="sng" algn="ctr">
+                      <a:solidFill>
+                        <a:schemeClr val="tx1"/>
+                      </a:solidFill>
+                      <a:prstDash val="solid"/>
+                      <a:round/>
+                      <a:headEnd type="none" w="med" len="med"/>
+                      <a:tailEnd type="none" w="med" len="med"/>
+                    </a:lnT>
+                    <a:lnB w="12700" cap="flat" cmpd="sng" algn="ctr">
+                      <a:solidFill>
+                        <a:schemeClr val="tx1"/>
+                      </a:solidFill>
+                      <a:prstDash val="solid"/>
+                      <a:round/>
+                      <a:headEnd type="none" w="med" len="med"/>
+                      <a:tailEnd type="none" w="med" len="med"/>
+                    </a:lnB>
+                  </a:tcPr>
+                </a:tc>
+                <a:extLst>
+                  <a:ext uri="{0D108BD9-81ED-4DB2-BD59-A6C34878D82A}">
+                    <a16:rowId xmlns:a16="http://schemas.microsoft.com/office/drawing/2014/main" val="3826821517"/>
+                  </a:ext>
+                </a:extLst>
+              </a:tr>
+              <a:tr h="211375">
+                <a:tc>
+                  <a:txBody>
+                    <a:bodyPr/>
+                    <a:lstStyle/>
+                    <a:p>
+                      <a:pPr algn="l" fontAlgn="b">
+                        <a:spcBef>
+                          <a:spcPts val="200"/>
+                        </a:spcBef>
+                      </a:pPr>
+                      <a:r>
+                        <a:rPr lang="en-IN" sz="1500" u="none" strike="noStrike" dirty="0">
+                          <a:effectLst/>
+                          <a:latin typeface="Courier New" panose="02070309020205020404" pitchFamily="49" charset="0"/>
+                          <a:cs typeface="Courier New" panose="02070309020205020404" pitchFamily="49" charset="0"/>
+                        </a:rPr>
+                        <a:t>RELATED</a:t>
+                      </a:r>
+                      <a:endParaRPr lang="en-IN" sz="1500" b="1" i="0" u="none" strike="noStrike" dirty="0">
+                        <a:solidFill>
+                          <a:srgbClr val="000000"/>
+                        </a:solidFill>
+                        <a:effectLst/>
+                        <a:latin typeface="Courier New" panose="02070309020205020404" pitchFamily="49" charset="0"/>
+                        <a:cs typeface="Courier New" panose="02070309020205020404" pitchFamily="49" charset="0"/>
+                      </a:endParaRPr>
+                    </a:p>
+                  </a:txBody>
+                  <a:tcPr marL="7620" marR="7620" marT="7620" marB="0" anchor="b">
+                    <a:lnT w="12700" cap="flat" cmpd="sng" algn="ctr">
+                      <a:solidFill>
+                        <a:schemeClr val="tx1"/>
+                      </a:solidFill>
+                      <a:prstDash val="solid"/>
+                      <a:round/>
+                      <a:headEnd type="none" w="med" len="med"/>
+                      <a:tailEnd type="none" w="med" len="med"/>
+                    </a:lnT>
+                  </a:tcPr>
+                </a:tc>
+                <a:tc>
+                  <a:txBody>
+                    <a:bodyPr/>
+                    <a:lstStyle/>
+                    <a:p>
+                      <a:pPr algn="l" fontAlgn="b">
+                        <a:spcBef>
+                          <a:spcPts val="200"/>
+                        </a:spcBef>
+                      </a:pPr>
+                      <a:r>
+                        <a:rPr lang="en-IN" sz="1300" u="none" strike="noStrike" baseline="0" dirty="0" smtClean="0">
+                          <a:effectLst/>
+                          <a:latin typeface="Courier New" panose="02070309020205020404" pitchFamily="49" charset="0"/>
+                          <a:cs typeface="Courier New" panose="02070309020205020404" pitchFamily="49" charset="0"/>
+                        </a:rPr>
+                        <a:t> </a:t>
+                      </a:r>
+                      <a:r>
+                        <a:rPr lang="en-IN" sz="1300" u="none" strike="noStrike" dirty="0" smtClean="0">
+                          <a:effectLst/>
+                          <a:latin typeface="Courier New" panose="02070309020205020404" pitchFamily="49" charset="0"/>
+                          <a:cs typeface="Courier New" panose="02070309020205020404" pitchFamily="49" charset="0"/>
+                        </a:rPr>
+                        <a:t>RELATED(Product[Price</a:t>
+                      </a:r>
+                      <a:r>
+                        <a:rPr lang="en-IN" sz="1300" u="none" strike="noStrike" dirty="0">
+                          <a:effectLst/>
+                          <a:latin typeface="Courier New" panose="02070309020205020404" pitchFamily="49" charset="0"/>
+                          <a:cs typeface="Courier New" panose="02070309020205020404" pitchFamily="49" charset="0"/>
+                        </a:rPr>
+                        <a:t>])</a:t>
+                      </a:r>
+                      <a:endParaRPr lang="en-IN" sz="1300" b="0" i="0" u="none" strike="noStrike" dirty="0">
+                        <a:solidFill>
+                          <a:srgbClr val="000000"/>
+                        </a:solidFill>
+                        <a:effectLst/>
+                        <a:latin typeface="Courier New" panose="02070309020205020404" pitchFamily="49" charset="0"/>
+                        <a:cs typeface="Courier New" panose="02070309020205020404" pitchFamily="49" charset="0"/>
+                      </a:endParaRPr>
+                    </a:p>
+                  </a:txBody>
+                  <a:tcPr marL="7620" marR="7620" marT="7620" marB="0" anchor="b">
+                    <a:lnT w="12700" cap="flat" cmpd="sng" algn="ctr">
+                      <a:solidFill>
+                        <a:schemeClr val="tx1"/>
+                      </a:solidFill>
+                      <a:prstDash val="solid"/>
+                      <a:round/>
+                      <a:headEnd type="none" w="med" len="med"/>
+                      <a:tailEnd type="none" w="med" len="med"/>
+                    </a:lnT>
+                  </a:tcPr>
+                </a:tc>
+                <a:extLst>
+                  <a:ext uri="{0D108BD9-81ED-4DB2-BD59-A6C34878D82A}">
+                    <a16:rowId xmlns:a16="http://schemas.microsoft.com/office/drawing/2014/main" val="2843789993"/>
+                  </a:ext>
+                </a:extLst>
+              </a:tr>
+            </a:tbl>
+          </a:graphicData>
+        </a:graphic>
+      </p:graphicFrame>
       <p:sp>
         <p:nvSpPr>
           <p:cNvPr id="3" name="Rectangle 2"/>
@@ -17808,164 +18843,81 @@
         </p:nvSpPr>
         <p:spPr>
           <a:xfrm>
-            <a:off x="612821" y="327514"/>
-            <a:ext cx="3865161" cy="353943"/>
+            <a:off x="344129" y="411796"/>
+            <a:ext cx="6096000" cy="646331"/>
           </a:xfrm>
           <a:prstGeom prst="rect">
             <a:avLst/>
           </a:prstGeom>
         </p:spPr>
         <p:txBody>
-          <a:bodyPr wrap="none">
+          <a:bodyPr>
             <a:spAutoFit/>
           </a:bodyPr>
           <a:lstStyle/>
           <a:p>
-            <a:r>
-              <a:rPr lang="en-IN" sz="1700" b="1" dirty="0">
-                <a:latin typeface="Courier New" panose="02070309020205020404" pitchFamily="49" charset="0"/>
-                <a:cs typeface="Courier New" panose="02070309020205020404" pitchFamily="49" charset="0"/>
+            <a:pPr lvl="0" eaLnBrk="0" fontAlgn="base" hangingPunct="0">
+              <a:spcBef>
+                <a:spcPct val="0"/>
+              </a:spcBef>
+              <a:spcAft>
+                <a:spcPct val="0"/>
+              </a:spcAft>
+            </a:pPr>
+            <a:r>
+              <a:rPr lang="en-US" altLang="en-US" b="1" dirty="0">
+                <a:solidFill>
+                  <a:schemeClr val="accent1">
+                    <a:lumMod val="60000"/>
+                    <a:lumOff val="40000"/>
+                  </a:schemeClr>
+                </a:solidFill>
+                <a:latin typeface="Candara" panose="020E0502030303020204" pitchFamily="34" charset="0"/>
               </a:rPr>
-              <a:t>CALCULATE &amp; FILTER Functions</a:t>
-            </a:r>
-          </a:p>
-        </p:txBody>
-      </p:sp>
-      <p:sp>
-        <p:nvSpPr>
-          <p:cNvPr id="4" name="Rectangle 3"/>
-          <p:cNvSpPr/>
-          <p:nvPr/>
-        </p:nvSpPr>
-        <p:spPr>
-          <a:xfrm>
-            <a:off x="612821" y="4356695"/>
-            <a:ext cx="9464233" cy="1923604"/>
-          </a:xfrm>
-          <a:prstGeom prst="rect">
-            <a:avLst/>
-          </a:prstGeom>
-        </p:spPr>
-        <p:txBody>
-          <a:bodyPr wrap="square">
-            <a:spAutoFit/>
-          </a:bodyPr>
-          <a:lstStyle/>
-          <a:p>
-            <a:r>
-              <a:rPr lang="en-IN" sz="1700" dirty="0">
-                <a:latin typeface="Courier New" panose="02070309020205020404" pitchFamily="49" charset="0"/>
-                <a:cs typeface="Courier New" panose="02070309020205020404" pitchFamily="49" charset="0"/>
+              <a:t>Filter </a:t>
+            </a:r>
+            <a:r>
+              <a:rPr lang="en-US" altLang="en-US" b="1" dirty="0" smtClean="0">
+                <a:solidFill>
+                  <a:schemeClr val="accent1">
+                    <a:lumMod val="60000"/>
+                    <a:lumOff val="40000"/>
+                  </a:schemeClr>
+                </a:solidFill>
+                <a:latin typeface="Candara" panose="020E0502030303020204" pitchFamily="34" charset="0"/>
               </a:rPr>
-              <a:t>SWITCH</a:t>
-            </a:r>
-          </a:p>
-          <a:p>
-            <a:endParaRPr lang="en-IN" sz="1700" dirty="0" smtClean="0">
-              <a:latin typeface="Courier New" panose="02070309020205020404" pitchFamily="49" charset="0"/>
-              <a:cs typeface="Courier New" panose="02070309020205020404" pitchFamily="49" charset="0"/>
+              <a:t>&amp; Calculate functions</a:t>
+            </a:r>
+            <a:endParaRPr lang="en-US" altLang="en-US" dirty="0">
+              <a:solidFill>
+                <a:schemeClr val="accent1">
+                  <a:lumMod val="60000"/>
+                  <a:lumOff val="40000"/>
+                </a:schemeClr>
+              </a:solidFill>
+              <a:latin typeface="Candara" panose="020E0502030303020204" pitchFamily="34" charset="0"/>
             </a:endParaRPr>
           </a:p>
           <a:p>
-            <a:r>
-              <a:rPr lang="en-IN" sz="1700" dirty="0" smtClean="0">
-                <a:latin typeface="Courier New" panose="02070309020205020404" pitchFamily="49" charset="0"/>
-                <a:cs typeface="Courier New" panose="02070309020205020404" pitchFamily="49" charset="0"/>
+            <a:pPr lvl="1" eaLnBrk="0" fontAlgn="base" hangingPunct="0">
+              <a:spcBef>
+                <a:spcPct val="0"/>
+              </a:spcBef>
+              <a:spcAft>
+                <a:spcPct val="0"/>
+              </a:spcAft>
+            </a:pPr>
+            <a:r>
+              <a:rPr lang="en-US" altLang="en-US" dirty="0">
+                <a:solidFill>
+                  <a:schemeClr val="accent1">
+                    <a:lumMod val="60000"/>
+                    <a:lumOff val="40000"/>
+                  </a:schemeClr>
+                </a:solidFill>
+                <a:latin typeface="Candara" panose="020E0502030303020204" pitchFamily="34" charset="0"/>
               </a:rPr>
-              <a:t>Performance =</a:t>
-            </a:r>
-          </a:p>
-          <a:p>
-            <a:r>
-              <a:rPr lang="en-IN" sz="1700" dirty="0" smtClean="0">
-                <a:latin typeface="Courier New" panose="02070309020205020404" pitchFamily="49" charset="0"/>
-                <a:cs typeface="Courier New" panose="02070309020205020404" pitchFamily="49" charset="0"/>
-              </a:rPr>
-              <a:t>SWITCH</a:t>
-            </a:r>
-            <a:r>
-              <a:rPr lang="en-IN" sz="1700" dirty="0">
-                <a:latin typeface="Courier New" panose="02070309020205020404" pitchFamily="49" charset="0"/>
-                <a:cs typeface="Courier New" panose="02070309020205020404" pitchFamily="49" charset="0"/>
-              </a:rPr>
-              <a:t>(    </a:t>
-            </a:r>
-            <a:endParaRPr lang="en-IN" sz="1700" dirty="0" smtClean="0">
-              <a:latin typeface="Courier New" panose="02070309020205020404" pitchFamily="49" charset="0"/>
-              <a:cs typeface="Courier New" panose="02070309020205020404" pitchFamily="49" charset="0"/>
-            </a:endParaRPr>
-          </a:p>
-          <a:p>
-            <a:pPr lvl="1"/>
-            <a:r>
-              <a:rPr lang="en-IN" sz="1700" dirty="0" smtClean="0">
-                <a:latin typeface="Courier New" panose="02070309020205020404" pitchFamily="49" charset="0"/>
-                <a:cs typeface="Courier New" panose="02070309020205020404" pitchFamily="49" charset="0"/>
-              </a:rPr>
-              <a:t>TRUE</a:t>
-            </a:r>
-            <a:r>
-              <a:rPr lang="en-IN" sz="1700" dirty="0">
-                <a:latin typeface="Courier New" panose="02070309020205020404" pitchFamily="49" charset="0"/>
-                <a:cs typeface="Courier New" panose="02070309020205020404" pitchFamily="49" charset="0"/>
-              </a:rPr>
-              <a:t>(),    </a:t>
-            </a:r>
-            <a:endParaRPr lang="en-IN" sz="1700" dirty="0" smtClean="0">
-              <a:latin typeface="Courier New" panose="02070309020205020404" pitchFamily="49" charset="0"/>
-              <a:cs typeface="Courier New" panose="02070309020205020404" pitchFamily="49" charset="0"/>
-            </a:endParaRPr>
-          </a:p>
-          <a:p>
-            <a:pPr lvl="1"/>
-            <a:r>
-              <a:rPr lang="en-IN" sz="1700" dirty="0" smtClean="0">
-                <a:latin typeface="Courier New" panose="02070309020205020404" pitchFamily="49" charset="0"/>
-                <a:cs typeface="Courier New" panose="02070309020205020404" pitchFamily="49" charset="0"/>
-              </a:rPr>
-              <a:t>[</a:t>
-            </a:r>
-            <a:r>
-              <a:rPr lang="en-IN" sz="1700" dirty="0">
-                <a:latin typeface="Courier New" panose="02070309020205020404" pitchFamily="49" charset="0"/>
-                <a:cs typeface="Courier New" panose="02070309020205020404" pitchFamily="49" charset="0"/>
-              </a:rPr>
-              <a:t>Sales] &lt; 10000, "Low",    </a:t>
-            </a:r>
-            <a:endParaRPr lang="en-IN" sz="1700" dirty="0" smtClean="0">
-              <a:latin typeface="Courier New" panose="02070309020205020404" pitchFamily="49" charset="0"/>
-              <a:cs typeface="Courier New" panose="02070309020205020404" pitchFamily="49" charset="0"/>
-            </a:endParaRPr>
-          </a:p>
-          <a:p>
-            <a:pPr lvl="1"/>
-            <a:r>
-              <a:rPr lang="en-IN" sz="1700" dirty="0" smtClean="0">
-                <a:latin typeface="Courier New" panose="02070309020205020404" pitchFamily="49" charset="0"/>
-                <a:cs typeface="Courier New" panose="02070309020205020404" pitchFamily="49" charset="0"/>
-              </a:rPr>
-              <a:t>[</a:t>
-            </a:r>
-            <a:r>
-              <a:rPr lang="en-IN" sz="1700" dirty="0">
-                <a:latin typeface="Courier New" panose="02070309020205020404" pitchFamily="49" charset="0"/>
-                <a:cs typeface="Courier New" panose="02070309020205020404" pitchFamily="49" charset="0"/>
-              </a:rPr>
-              <a:t>Sales] &lt; 50000, "Medium</a:t>
-            </a:r>
-            <a:r>
-              <a:rPr lang="en-IN" sz="1700" dirty="0" smtClean="0">
-                <a:latin typeface="Courier New" panose="02070309020205020404" pitchFamily="49" charset="0"/>
-                <a:cs typeface="Courier New" panose="02070309020205020404" pitchFamily="49" charset="0"/>
-              </a:rPr>
-              <a:t>", "</a:t>
-            </a:r>
-            <a:r>
-              <a:rPr lang="en-IN" sz="1700" dirty="0">
-                <a:latin typeface="Courier New" panose="02070309020205020404" pitchFamily="49" charset="0"/>
-                <a:cs typeface="Courier New" panose="02070309020205020404" pitchFamily="49" charset="0"/>
-              </a:rPr>
-              <a:t>High")</a:t>
+              <a:t>Filter functions manipulate table and filter contexts.</a:t>
             </a:r>
           </a:p>
         </p:txBody>
@@ -17973,7 +18925,7 @@
     </p:spTree>
     <p:extLst>
       <p:ext uri="{BB962C8B-B14F-4D97-AF65-F5344CB8AC3E}">
-        <p14:creationId xmlns:p14="http://schemas.microsoft.com/office/powerpoint/2010/main" val="1813562066"/>
+        <p14:creationId xmlns:p14="http://schemas.microsoft.com/office/powerpoint/2010/main" val="2206240905"/>
       </p:ext>
     </p:extLst>
   </p:cSld>
@@ -17983,1006 +18935,7 @@
   <p:timing>
     <p:tnLst>
       <p:par>
-        <p:cTn id="1" dur="indefinite" restart="never" nodeType="tmRoot">
-          <p:childTnLst>
-            <p:seq concurrent="1" nextAc="seek">
-              <p:cTn id="2" dur="indefinite" nodeType="mainSeq">
-                <p:childTnLst>
-                  <p:par>
-                    <p:cTn id="3" fill="hold">
-                      <p:stCondLst>
-                        <p:cond delay="indefinite"/>
-                      </p:stCondLst>
-                      <p:childTnLst>
-                        <p:par>
-                          <p:cTn id="4" fill="hold">
-                            <p:stCondLst>
-                              <p:cond delay="0"/>
-                            </p:stCondLst>
-                            <p:childTnLst>
-                              <p:par>
-                                <p:cTn id="5" presetID="22" presetClass="entr" presetSubtype="8" fill="hold" nodeType="clickEffect">
-                                  <p:stCondLst>
-                                    <p:cond delay="0"/>
-                                  </p:stCondLst>
-                                  <p:childTnLst>
-                                    <p:set>
-                                      <p:cBhvr>
-                                        <p:cTn id="6" dur="1" fill="hold">
-                                          <p:stCondLst>
-                                            <p:cond delay="0"/>
-                                          </p:stCondLst>
-                                        </p:cTn>
-                                        <p:tgtEl>
-                                          <p:spTgt spid="3">
-                                            <p:txEl>
-                                              <p:pRg st="0" end="0"/>
-                                            </p:txEl>
-                                          </p:spTgt>
-                                        </p:tgtEl>
-                                        <p:attrNameLst>
-                                          <p:attrName>style.visibility</p:attrName>
-                                        </p:attrNameLst>
-                                      </p:cBhvr>
-                                      <p:to>
-                                        <p:strVal val="visible"/>
-                                      </p:to>
-                                    </p:set>
-                                    <p:animEffect transition="in" filter="wipe(left)">
-                                      <p:cBhvr>
-                                        <p:cTn id="7" dur="500"/>
-                                        <p:tgtEl>
-                                          <p:spTgt spid="3">
-                                            <p:txEl>
-                                              <p:pRg st="0" end="0"/>
-                                            </p:txEl>
-                                          </p:spTgt>
-                                        </p:tgtEl>
-                                      </p:cBhvr>
-                                    </p:animEffect>
-                                  </p:childTnLst>
-                                </p:cTn>
-                              </p:par>
-                            </p:childTnLst>
-                          </p:cTn>
-                        </p:par>
-                      </p:childTnLst>
-                    </p:cTn>
-                  </p:par>
-                  <p:par>
-                    <p:cTn id="8" fill="hold">
-                      <p:stCondLst>
-                        <p:cond delay="indefinite"/>
-                      </p:stCondLst>
-                      <p:childTnLst>
-                        <p:par>
-                          <p:cTn id="9" fill="hold">
-                            <p:stCondLst>
-                              <p:cond delay="0"/>
-                            </p:stCondLst>
-                            <p:childTnLst>
-                              <p:par>
-                                <p:cTn id="10" presetID="22" presetClass="entr" presetSubtype="8" fill="hold" nodeType="clickEffect">
-                                  <p:stCondLst>
-                                    <p:cond delay="0"/>
-                                  </p:stCondLst>
-                                  <p:childTnLst>
-                                    <p:set>
-                                      <p:cBhvr>
-                                        <p:cTn id="11" dur="1" fill="hold">
-                                          <p:stCondLst>
-                                            <p:cond delay="0"/>
-                                          </p:stCondLst>
-                                        </p:cTn>
-                                        <p:tgtEl>
-                                          <p:spTgt spid="2">
-                                            <p:txEl>
-                                              <p:pRg st="0" end="0"/>
-                                            </p:txEl>
-                                          </p:spTgt>
-                                        </p:tgtEl>
-                                        <p:attrNameLst>
-                                          <p:attrName>style.visibility</p:attrName>
-                                        </p:attrNameLst>
-                                      </p:cBhvr>
-                                      <p:to>
-                                        <p:strVal val="visible"/>
-                                      </p:to>
-                                    </p:set>
-                                    <p:animEffect transition="in" filter="wipe(left)">
-                                      <p:cBhvr>
-                                        <p:cTn id="12" dur="500"/>
-                                        <p:tgtEl>
-                                          <p:spTgt spid="2">
-                                            <p:txEl>
-                                              <p:pRg st="0" end="0"/>
-                                            </p:txEl>
-                                          </p:spTgt>
-                                        </p:tgtEl>
-                                      </p:cBhvr>
-                                    </p:animEffect>
-                                  </p:childTnLst>
-                                </p:cTn>
-                              </p:par>
-                            </p:childTnLst>
-                          </p:cTn>
-                        </p:par>
-                      </p:childTnLst>
-                    </p:cTn>
-                  </p:par>
-                  <p:par>
-                    <p:cTn id="13" fill="hold">
-                      <p:stCondLst>
-                        <p:cond delay="indefinite"/>
-                      </p:stCondLst>
-                      <p:childTnLst>
-                        <p:par>
-                          <p:cTn id="14" fill="hold">
-                            <p:stCondLst>
-                              <p:cond delay="0"/>
-                            </p:stCondLst>
-                            <p:childTnLst>
-                              <p:par>
-                                <p:cTn id="15" presetID="22" presetClass="entr" presetSubtype="8" fill="hold" nodeType="clickEffect">
-                                  <p:stCondLst>
-                                    <p:cond delay="0"/>
-                                  </p:stCondLst>
-                                  <p:childTnLst>
-                                    <p:set>
-                                      <p:cBhvr>
-                                        <p:cTn id="16" dur="1" fill="hold">
-                                          <p:stCondLst>
-                                            <p:cond delay="0"/>
-                                          </p:stCondLst>
-                                        </p:cTn>
-                                        <p:tgtEl>
-                                          <p:spTgt spid="2">
-                                            <p:txEl>
-                                              <p:pRg st="1" end="1"/>
-                                            </p:txEl>
-                                          </p:spTgt>
-                                        </p:tgtEl>
-                                        <p:attrNameLst>
-                                          <p:attrName>style.visibility</p:attrName>
-                                        </p:attrNameLst>
-                                      </p:cBhvr>
-                                      <p:to>
-                                        <p:strVal val="visible"/>
-                                      </p:to>
-                                    </p:set>
-                                    <p:animEffect transition="in" filter="wipe(left)">
-                                      <p:cBhvr>
-                                        <p:cTn id="17" dur="500"/>
-                                        <p:tgtEl>
-                                          <p:spTgt spid="2">
-                                            <p:txEl>
-                                              <p:pRg st="1" end="1"/>
-                                            </p:txEl>
-                                          </p:spTgt>
-                                        </p:tgtEl>
-                                      </p:cBhvr>
-                                    </p:animEffect>
-                                  </p:childTnLst>
-                                </p:cTn>
-                              </p:par>
-                            </p:childTnLst>
-                          </p:cTn>
-                        </p:par>
-                      </p:childTnLst>
-                    </p:cTn>
-                  </p:par>
-                  <p:par>
-                    <p:cTn id="18" fill="hold">
-                      <p:stCondLst>
-                        <p:cond delay="indefinite"/>
-                      </p:stCondLst>
-                      <p:childTnLst>
-                        <p:par>
-                          <p:cTn id="19" fill="hold">
-                            <p:stCondLst>
-                              <p:cond delay="0"/>
-                            </p:stCondLst>
-                            <p:childTnLst>
-                              <p:par>
-                                <p:cTn id="20" presetID="22" presetClass="entr" presetSubtype="8" fill="hold" nodeType="clickEffect">
-                                  <p:stCondLst>
-                                    <p:cond delay="0"/>
-                                  </p:stCondLst>
-                                  <p:childTnLst>
-                                    <p:set>
-                                      <p:cBhvr>
-                                        <p:cTn id="21" dur="1" fill="hold">
-                                          <p:stCondLst>
-                                            <p:cond delay="0"/>
-                                          </p:stCondLst>
-                                        </p:cTn>
-                                        <p:tgtEl>
-                                          <p:spTgt spid="2">
-                                            <p:txEl>
-                                              <p:pRg st="4" end="4"/>
-                                            </p:txEl>
-                                          </p:spTgt>
-                                        </p:tgtEl>
-                                        <p:attrNameLst>
-                                          <p:attrName>style.visibility</p:attrName>
-                                        </p:attrNameLst>
-                                      </p:cBhvr>
-                                      <p:to>
-                                        <p:strVal val="visible"/>
-                                      </p:to>
-                                    </p:set>
-                                    <p:animEffect transition="in" filter="wipe(left)">
-                                      <p:cBhvr>
-                                        <p:cTn id="22" dur="500"/>
-                                        <p:tgtEl>
-                                          <p:spTgt spid="2">
-                                            <p:txEl>
-                                              <p:pRg st="4" end="4"/>
-                                            </p:txEl>
-                                          </p:spTgt>
-                                        </p:tgtEl>
-                                      </p:cBhvr>
-                                    </p:animEffect>
-                                  </p:childTnLst>
-                                </p:cTn>
-                              </p:par>
-                            </p:childTnLst>
-                          </p:cTn>
-                        </p:par>
-                      </p:childTnLst>
-                    </p:cTn>
-                  </p:par>
-                  <p:par>
-                    <p:cTn id="23" fill="hold">
-                      <p:stCondLst>
-                        <p:cond delay="indefinite"/>
-                      </p:stCondLst>
-                      <p:childTnLst>
-                        <p:par>
-                          <p:cTn id="24" fill="hold">
-                            <p:stCondLst>
-                              <p:cond delay="0"/>
-                            </p:stCondLst>
-                            <p:childTnLst>
-                              <p:par>
-                                <p:cTn id="25" presetID="22" presetClass="entr" presetSubtype="8" fill="hold" nodeType="clickEffect">
-                                  <p:stCondLst>
-                                    <p:cond delay="0"/>
-                                  </p:stCondLst>
-                                  <p:childTnLst>
-                                    <p:set>
-                                      <p:cBhvr>
-                                        <p:cTn id="26" dur="1" fill="hold">
-                                          <p:stCondLst>
-                                            <p:cond delay="0"/>
-                                          </p:stCondLst>
-                                        </p:cTn>
-                                        <p:tgtEl>
-                                          <p:spTgt spid="2">
-                                            <p:txEl>
-                                              <p:pRg st="5" end="5"/>
-                                            </p:txEl>
-                                          </p:spTgt>
-                                        </p:tgtEl>
-                                        <p:attrNameLst>
-                                          <p:attrName>style.visibility</p:attrName>
-                                        </p:attrNameLst>
-                                      </p:cBhvr>
-                                      <p:to>
-                                        <p:strVal val="visible"/>
-                                      </p:to>
-                                    </p:set>
-                                    <p:animEffect transition="in" filter="wipe(left)">
-                                      <p:cBhvr>
-                                        <p:cTn id="27" dur="500"/>
-                                        <p:tgtEl>
-                                          <p:spTgt spid="2">
-                                            <p:txEl>
-                                              <p:pRg st="5" end="5"/>
-                                            </p:txEl>
-                                          </p:spTgt>
-                                        </p:tgtEl>
-                                      </p:cBhvr>
-                                    </p:animEffect>
-                                  </p:childTnLst>
-                                </p:cTn>
-                              </p:par>
-                            </p:childTnLst>
-                          </p:cTn>
-                        </p:par>
-                      </p:childTnLst>
-                    </p:cTn>
-                  </p:par>
-                  <p:par>
-                    <p:cTn id="28" fill="hold">
-                      <p:stCondLst>
-                        <p:cond delay="indefinite"/>
-                      </p:stCondLst>
-                      <p:childTnLst>
-                        <p:par>
-                          <p:cTn id="29" fill="hold">
-                            <p:stCondLst>
-                              <p:cond delay="0"/>
-                            </p:stCondLst>
-                            <p:childTnLst>
-                              <p:par>
-                                <p:cTn id="30" presetID="22" presetClass="entr" presetSubtype="8" fill="hold" nodeType="clickEffect">
-                                  <p:stCondLst>
-                                    <p:cond delay="0"/>
-                                  </p:stCondLst>
-                                  <p:childTnLst>
-                                    <p:set>
-                                      <p:cBhvr>
-                                        <p:cTn id="31" dur="1" fill="hold">
-                                          <p:stCondLst>
-                                            <p:cond delay="0"/>
-                                          </p:stCondLst>
-                                        </p:cTn>
-                                        <p:tgtEl>
-                                          <p:spTgt spid="2">
-                                            <p:txEl>
-                                              <p:pRg st="6" end="6"/>
-                                            </p:txEl>
-                                          </p:spTgt>
-                                        </p:tgtEl>
-                                        <p:attrNameLst>
-                                          <p:attrName>style.visibility</p:attrName>
-                                        </p:attrNameLst>
-                                      </p:cBhvr>
-                                      <p:to>
-                                        <p:strVal val="visible"/>
-                                      </p:to>
-                                    </p:set>
-                                    <p:animEffect transition="in" filter="wipe(left)">
-                                      <p:cBhvr>
-                                        <p:cTn id="32" dur="500"/>
-                                        <p:tgtEl>
-                                          <p:spTgt spid="2">
-                                            <p:txEl>
-                                              <p:pRg st="6" end="6"/>
-                                            </p:txEl>
-                                          </p:spTgt>
-                                        </p:tgtEl>
-                                      </p:cBhvr>
-                                    </p:animEffect>
-                                  </p:childTnLst>
-                                </p:cTn>
-                              </p:par>
-                            </p:childTnLst>
-                          </p:cTn>
-                        </p:par>
-                      </p:childTnLst>
-                    </p:cTn>
-                  </p:par>
-                  <p:par>
-                    <p:cTn id="33" fill="hold">
-                      <p:stCondLst>
-                        <p:cond delay="indefinite"/>
-                      </p:stCondLst>
-                      <p:childTnLst>
-                        <p:par>
-                          <p:cTn id="34" fill="hold">
-                            <p:stCondLst>
-                              <p:cond delay="0"/>
-                            </p:stCondLst>
-                            <p:childTnLst>
-                              <p:par>
-                                <p:cTn id="35" presetID="22" presetClass="entr" presetSubtype="8" fill="hold" nodeType="clickEffect">
-                                  <p:stCondLst>
-                                    <p:cond delay="0"/>
-                                  </p:stCondLst>
-                                  <p:childTnLst>
-                                    <p:set>
-                                      <p:cBhvr>
-                                        <p:cTn id="36" dur="1" fill="hold">
-                                          <p:stCondLst>
-                                            <p:cond delay="0"/>
-                                          </p:stCondLst>
-                                        </p:cTn>
-                                        <p:tgtEl>
-                                          <p:spTgt spid="2">
-                                            <p:txEl>
-                                              <p:pRg st="7" end="7"/>
-                                            </p:txEl>
-                                          </p:spTgt>
-                                        </p:tgtEl>
-                                        <p:attrNameLst>
-                                          <p:attrName>style.visibility</p:attrName>
-                                        </p:attrNameLst>
-                                      </p:cBhvr>
-                                      <p:to>
-                                        <p:strVal val="visible"/>
-                                      </p:to>
-                                    </p:set>
-                                    <p:animEffect transition="in" filter="wipe(left)">
-                                      <p:cBhvr>
-                                        <p:cTn id="37" dur="500"/>
-                                        <p:tgtEl>
-                                          <p:spTgt spid="2">
-                                            <p:txEl>
-                                              <p:pRg st="7" end="7"/>
-                                            </p:txEl>
-                                          </p:spTgt>
-                                        </p:tgtEl>
-                                      </p:cBhvr>
-                                    </p:animEffect>
-                                  </p:childTnLst>
-                                </p:cTn>
-                              </p:par>
-                            </p:childTnLst>
-                          </p:cTn>
-                        </p:par>
-                      </p:childTnLst>
-                    </p:cTn>
-                  </p:par>
-                  <p:par>
-                    <p:cTn id="38" fill="hold">
-                      <p:stCondLst>
-                        <p:cond delay="indefinite"/>
-                      </p:stCondLst>
-                      <p:childTnLst>
-                        <p:par>
-                          <p:cTn id="39" fill="hold">
-                            <p:stCondLst>
-                              <p:cond delay="0"/>
-                            </p:stCondLst>
-                            <p:childTnLst>
-                              <p:par>
-                                <p:cTn id="40" presetID="22" presetClass="entr" presetSubtype="8" fill="hold" nodeType="clickEffect">
-                                  <p:stCondLst>
-                                    <p:cond delay="0"/>
-                                  </p:stCondLst>
-                                  <p:childTnLst>
-                                    <p:set>
-                                      <p:cBhvr>
-                                        <p:cTn id="41" dur="1" fill="hold">
-                                          <p:stCondLst>
-                                            <p:cond delay="0"/>
-                                          </p:stCondLst>
-                                        </p:cTn>
-                                        <p:tgtEl>
-                                          <p:spTgt spid="2">
-                                            <p:txEl>
-                                              <p:pRg st="8" end="8"/>
-                                            </p:txEl>
-                                          </p:spTgt>
-                                        </p:tgtEl>
-                                        <p:attrNameLst>
-                                          <p:attrName>style.visibility</p:attrName>
-                                        </p:attrNameLst>
-                                      </p:cBhvr>
-                                      <p:to>
-                                        <p:strVal val="visible"/>
-                                      </p:to>
-                                    </p:set>
-                                    <p:animEffect transition="in" filter="wipe(left)">
-                                      <p:cBhvr>
-                                        <p:cTn id="42" dur="500"/>
-                                        <p:tgtEl>
-                                          <p:spTgt spid="2">
-                                            <p:txEl>
-                                              <p:pRg st="8" end="8"/>
-                                            </p:txEl>
-                                          </p:spTgt>
-                                        </p:tgtEl>
-                                      </p:cBhvr>
-                                    </p:animEffect>
-                                  </p:childTnLst>
-                                </p:cTn>
-                              </p:par>
-                            </p:childTnLst>
-                          </p:cTn>
-                        </p:par>
-                      </p:childTnLst>
-                    </p:cTn>
-                  </p:par>
-                  <p:par>
-                    <p:cTn id="43" fill="hold">
-                      <p:stCondLst>
-                        <p:cond delay="indefinite"/>
-                      </p:stCondLst>
-                      <p:childTnLst>
-                        <p:par>
-                          <p:cTn id="44" fill="hold">
-                            <p:stCondLst>
-                              <p:cond delay="0"/>
-                            </p:stCondLst>
-                            <p:childTnLst>
-                              <p:par>
-                                <p:cTn id="45" presetID="22" presetClass="entr" presetSubtype="8" fill="hold" nodeType="clickEffect">
-                                  <p:stCondLst>
-                                    <p:cond delay="0"/>
-                                  </p:stCondLst>
-                                  <p:childTnLst>
-                                    <p:set>
-                                      <p:cBhvr>
-                                        <p:cTn id="46" dur="1" fill="hold">
-                                          <p:stCondLst>
-                                            <p:cond delay="0"/>
-                                          </p:stCondLst>
-                                        </p:cTn>
-                                        <p:tgtEl>
-                                          <p:spTgt spid="2">
-                                            <p:txEl>
-                                              <p:pRg st="9" end="9"/>
-                                            </p:txEl>
-                                          </p:spTgt>
-                                        </p:tgtEl>
-                                        <p:attrNameLst>
-                                          <p:attrName>style.visibility</p:attrName>
-                                        </p:attrNameLst>
-                                      </p:cBhvr>
-                                      <p:to>
-                                        <p:strVal val="visible"/>
-                                      </p:to>
-                                    </p:set>
-                                    <p:animEffect transition="in" filter="wipe(left)">
-                                      <p:cBhvr>
-                                        <p:cTn id="47" dur="500"/>
-                                        <p:tgtEl>
-                                          <p:spTgt spid="2">
-                                            <p:txEl>
-                                              <p:pRg st="9" end="9"/>
-                                            </p:txEl>
-                                          </p:spTgt>
-                                        </p:tgtEl>
-                                      </p:cBhvr>
-                                    </p:animEffect>
-                                  </p:childTnLst>
-                                </p:cTn>
-                              </p:par>
-                            </p:childTnLst>
-                          </p:cTn>
-                        </p:par>
-                      </p:childTnLst>
-                    </p:cTn>
-                  </p:par>
-                  <p:par>
-                    <p:cTn id="48" fill="hold">
-                      <p:stCondLst>
-                        <p:cond delay="indefinite"/>
-                      </p:stCondLst>
-                      <p:childTnLst>
-                        <p:par>
-                          <p:cTn id="49" fill="hold">
-                            <p:stCondLst>
-                              <p:cond delay="0"/>
-                            </p:stCondLst>
-                            <p:childTnLst>
-                              <p:par>
-                                <p:cTn id="50" presetID="22" presetClass="entr" presetSubtype="8" fill="hold" nodeType="clickEffect">
-                                  <p:stCondLst>
-                                    <p:cond delay="0"/>
-                                  </p:stCondLst>
-                                  <p:childTnLst>
-                                    <p:set>
-                                      <p:cBhvr>
-                                        <p:cTn id="51" dur="1" fill="hold">
-                                          <p:stCondLst>
-                                            <p:cond delay="0"/>
-                                          </p:stCondLst>
-                                        </p:cTn>
-                                        <p:tgtEl>
-                                          <p:spTgt spid="2">
-                                            <p:txEl>
-                                              <p:pRg st="10" end="10"/>
-                                            </p:txEl>
-                                          </p:spTgt>
-                                        </p:tgtEl>
-                                        <p:attrNameLst>
-                                          <p:attrName>style.visibility</p:attrName>
-                                        </p:attrNameLst>
-                                      </p:cBhvr>
-                                      <p:to>
-                                        <p:strVal val="visible"/>
-                                      </p:to>
-                                    </p:set>
-                                    <p:animEffect transition="in" filter="wipe(left)">
-                                      <p:cBhvr>
-                                        <p:cTn id="52" dur="500"/>
-                                        <p:tgtEl>
-                                          <p:spTgt spid="2">
-                                            <p:txEl>
-                                              <p:pRg st="10" end="10"/>
-                                            </p:txEl>
-                                          </p:spTgt>
-                                        </p:tgtEl>
-                                      </p:cBhvr>
-                                    </p:animEffect>
-                                  </p:childTnLst>
-                                </p:cTn>
-                              </p:par>
-                            </p:childTnLst>
-                          </p:cTn>
-                        </p:par>
-                      </p:childTnLst>
-                    </p:cTn>
-                  </p:par>
-                  <p:par>
-                    <p:cTn id="53" fill="hold">
-                      <p:stCondLst>
-                        <p:cond delay="indefinite"/>
-                      </p:stCondLst>
-                      <p:childTnLst>
-                        <p:par>
-                          <p:cTn id="54" fill="hold">
-                            <p:stCondLst>
-                              <p:cond delay="0"/>
-                            </p:stCondLst>
-                            <p:childTnLst>
-                              <p:par>
-                                <p:cTn id="55" presetID="22" presetClass="entr" presetSubtype="8" fill="hold" nodeType="clickEffect">
-                                  <p:stCondLst>
-                                    <p:cond delay="0"/>
-                                  </p:stCondLst>
-                                  <p:childTnLst>
-                                    <p:set>
-                                      <p:cBhvr>
-                                        <p:cTn id="56" dur="1" fill="hold">
-                                          <p:stCondLst>
-                                            <p:cond delay="0"/>
-                                          </p:stCondLst>
-                                        </p:cTn>
-                                        <p:tgtEl>
-                                          <p:spTgt spid="4">
-                                            <p:txEl>
-                                              <p:pRg st="0" end="0"/>
-                                            </p:txEl>
-                                          </p:spTgt>
-                                        </p:tgtEl>
-                                        <p:attrNameLst>
-                                          <p:attrName>style.visibility</p:attrName>
-                                        </p:attrNameLst>
-                                      </p:cBhvr>
-                                      <p:to>
-                                        <p:strVal val="visible"/>
-                                      </p:to>
-                                    </p:set>
-                                    <p:animEffect transition="in" filter="wipe(left)">
-                                      <p:cBhvr>
-                                        <p:cTn id="57" dur="500"/>
-                                        <p:tgtEl>
-                                          <p:spTgt spid="4">
-                                            <p:txEl>
-                                              <p:pRg st="0" end="0"/>
-                                            </p:txEl>
-                                          </p:spTgt>
-                                        </p:tgtEl>
-                                      </p:cBhvr>
-                                    </p:animEffect>
-                                  </p:childTnLst>
-                                </p:cTn>
-                              </p:par>
-                            </p:childTnLst>
-                          </p:cTn>
-                        </p:par>
-                      </p:childTnLst>
-                    </p:cTn>
-                  </p:par>
-                  <p:par>
-                    <p:cTn id="58" fill="hold">
-                      <p:stCondLst>
-                        <p:cond delay="indefinite"/>
-                      </p:stCondLst>
-                      <p:childTnLst>
-                        <p:par>
-                          <p:cTn id="59" fill="hold">
-                            <p:stCondLst>
-                              <p:cond delay="0"/>
-                            </p:stCondLst>
-                            <p:childTnLst>
-                              <p:par>
-                                <p:cTn id="60" presetID="22" presetClass="entr" presetSubtype="8" fill="hold" nodeType="clickEffect">
-                                  <p:stCondLst>
-                                    <p:cond delay="0"/>
-                                  </p:stCondLst>
-                                  <p:childTnLst>
-                                    <p:set>
-                                      <p:cBhvr>
-                                        <p:cTn id="61" dur="1" fill="hold">
-                                          <p:stCondLst>
-                                            <p:cond delay="0"/>
-                                          </p:stCondLst>
-                                        </p:cTn>
-                                        <p:tgtEl>
-                                          <p:spTgt spid="4">
-                                            <p:txEl>
-                                              <p:pRg st="2" end="2"/>
-                                            </p:txEl>
-                                          </p:spTgt>
-                                        </p:tgtEl>
-                                        <p:attrNameLst>
-                                          <p:attrName>style.visibility</p:attrName>
-                                        </p:attrNameLst>
-                                      </p:cBhvr>
-                                      <p:to>
-                                        <p:strVal val="visible"/>
-                                      </p:to>
-                                    </p:set>
-                                    <p:animEffect transition="in" filter="wipe(left)">
-                                      <p:cBhvr>
-                                        <p:cTn id="62" dur="500"/>
-                                        <p:tgtEl>
-                                          <p:spTgt spid="4">
-                                            <p:txEl>
-                                              <p:pRg st="2" end="2"/>
-                                            </p:txEl>
-                                          </p:spTgt>
-                                        </p:tgtEl>
-                                      </p:cBhvr>
-                                    </p:animEffect>
-                                  </p:childTnLst>
-                                </p:cTn>
-                              </p:par>
-                            </p:childTnLst>
-                          </p:cTn>
-                        </p:par>
-                      </p:childTnLst>
-                    </p:cTn>
-                  </p:par>
-                  <p:par>
-                    <p:cTn id="63" fill="hold">
-                      <p:stCondLst>
-                        <p:cond delay="indefinite"/>
-                      </p:stCondLst>
-                      <p:childTnLst>
-                        <p:par>
-                          <p:cTn id="64" fill="hold">
-                            <p:stCondLst>
-                              <p:cond delay="0"/>
-                            </p:stCondLst>
-                            <p:childTnLst>
-                              <p:par>
-                                <p:cTn id="65" presetID="22" presetClass="entr" presetSubtype="8" fill="hold" nodeType="clickEffect">
-                                  <p:stCondLst>
-                                    <p:cond delay="0"/>
-                                  </p:stCondLst>
-                                  <p:childTnLst>
-                                    <p:set>
-                                      <p:cBhvr>
-                                        <p:cTn id="66" dur="1" fill="hold">
-                                          <p:stCondLst>
-                                            <p:cond delay="0"/>
-                                          </p:stCondLst>
-                                        </p:cTn>
-                                        <p:tgtEl>
-                                          <p:spTgt spid="4">
-                                            <p:txEl>
-                                              <p:pRg st="3" end="3"/>
-                                            </p:txEl>
-                                          </p:spTgt>
-                                        </p:tgtEl>
-                                        <p:attrNameLst>
-                                          <p:attrName>style.visibility</p:attrName>
-                                        </p:attrNameLst>
-                                      </p:cBhvr>
-                                      <p:to>
-                                        <p:strVal val="visible"/>
-                                      </p:to>
-                                    </p:set>
-                                    <p:animEffect transition="in" filter="wipe(left)">
-                                      <p:cBhvr>
-                                        <p:cTn id="67" dur="500"/>
-                                        <p:tgtEl>
-                                          <p:spTgt spid="4">
-                                            <p:txEl>
-                                              <p:pRg st="3" end="3"/>
-                                            </p:txEl>
-                                          </p:spTgt>
-                                        </p:tgtEl>
-                                      </p:cBhvr>
-                                    </p:animEffect>
-                                  </p:childTnLst>
-                                </p:cTn>
-                              </p:par>
-                            </p:childTnLst>
-                          </p:cTn>
-                        </p:par>
-                      </p:childTnLst>
-                    </p:cTn>
-                  </p:par>
-                  <p:par>
-                    <p:cTn id="68" fill="hold">
-                      <p:stCondLst>
-                        <p:cond delay="indefinite"/>
-                      </p:stCondLst>
-                      <p:childTnLst>
-                        <p:par>
-                          <p:cTn id="69" fill="hold">
-                            <p:stCondLst>
-                              <p:cond delay="0"/>
-                            </p:stCondLst>
-                            <p:childTnLst>
-                              <p:par>
-                                <p:cTn id="70" presetID="22" presetClass="entr" presetSubtype="8" fill="hold" nodeType="clickEffect">
-                                  <p:stCondLst>
-                                    <p:cond delay="0"/>
-                                  </p:stCondLst>
-                                  <p:childTnLst>
-                                    <p:set>
-                                      <p:cBhvr>
-                                        <p:cTn id="71" dur="1" fill="hold">
-                                          <p:stCondLst>
-                                            <p:cond delay="0"/>
-                                          </p:stCondLst>
-                                        </p:cTn>
-                                        <p:tgtEl>
-                                          <p:spTgt spid="4">
-                                            <p:txEl>
-                                              <p:pRg st="4" end="4"/>
-                                            </p:txEl>
-                                          </p:spTgt>
-                                        </p:tgtEl>
-                                        <p:attrNameLst>
-                                          <p:attrName>style.visibility</p:attrName>
-                                        </p:attrNameLst>
-                                      </p:cBhvr>
-                                      <p:to>
-                                        <p:strVal val="visible"/>
-                                      </p:to>
-                                    </p:set>
-                                    <p:animEffect transition="in" filter="wipe(left)">
-                                      <p:cBhvr>
-                                        <p:cTn id="72" dur="500"/>
-                                        <p:tgtEl>
-                                          <p:spTgt spid="4">
-                                            <p:txEl>
-                                              <p:pRg st="4" end="4"/>
-                                            </p:txEl>
-                                          </p:spTgt>
-                                        </p:tgtEl>
-                                      </p:cBhvr>
-                                    </p:animEffect>
-                                  </p:childTnLst>
-                                </p:cTn>
-                              </p:par>
-                            </p:childTnLst>
-                          </p:cTn>
-                        </p:par>
-                      </p:childTnLst>
-                    </p:cTn>
-                  </p:par>
-                  <p:par>
-                    <p:cTn id="73" fill="hold">
-                      <p:stCondLst>
-                        <p:cond delay="indefinite"/>
-                      </p:stCondLst>
-                      <p:childTnLst>
-                        <p:par>
-                          <p:cTn id="74" fill="hold">
-                            <p:stCondLst>
-                              <p:cond delay="0"/>
-                            </p:stCondLst>
-                            <p:childTnLst>
-                              <p:par>
-                                <p:cTn id="75" presetID="22" presetClass="entr" presetSubtype="8" fill="hold" nodeType="clickEffect">
-                                  <p:stCondLst>
-                                    <p:cond delay="0"/>
-                                  </p:stCondLst>
-                                  <p:childTnLst>
-                                    <p:set>
-                                      <p:cBhvr>
-                                        <p:cTn id="76" dur="1" fill="hold">
-                                          <p:stCondLst>
-                                            <p:cond delay="0"/>
-                                          </p:stCondLst>
-                                        </p:cTn>
-                                        <p:tgtEl>
-                                          <p:spTgt spid="4">
-                                            <p:txEl>
-                                              <p:pRg st="5" end="5"/>
-                                            </p:txEl>
-                                          </p:spTgt>
-                                        </p:tgtEl>
-                                        <p:attrNameLst>
-                                          <p:attrName>style.visibility</p:attrName>
-                                        </p:attrNameLst>
-                                      </p:cBhvr>
-                                      <p:to>
-                                        <p:strVal val="visible"/>
-                                      </p:to>
-                                    </p:set>
-                                    <p:animEffect transition="in" filter="wipe(left)">
-                                      <p:cBhvr>
-                                        <p:cTn id="77" dur="500"/>
-                                        <p:tgtEl>
-                                          <p:spTgt spid="4">
-                                            <p:txEl>
-                                              <p:pRg st="5" end="5"/>
-                                            </p:txEl>
-                                          </p:spTgt>
-                                        </p:tgtEl>
-                                      </p:cBhvr>
-                                    </p:animEffect>
-                                  </p:childTnLst>
-                                </p:cTn>
-                              </p:par>
-                            </p:childTnLst>
-                          </p:cTn>
-                        </p:par>
-                      </p:childTnLst>
-                    </p:cTn>
-                  </p:par>
-                  <p:par>
-                    <p:cTn id="78" fill="hold">
-                      <p:stCondLst>
-                        <p:cond delay="indefinite"/>
-                      </p:stCondLst>
-                      <p:childTnLst>
-                        <p:par>
-                          <p:cTn id="79" fill="hold">
-                            <p:stCondLst>
-                              <p:cond delay="0"/>
-                            </p:stCondLst>
-                            <p:childTnLst>
-                              <p:par>
-                                <p:cTn id="80" presetID="22" presetClass="entr" presetSubtype="8" fill="hold" nodeType="clickEffect">
-                                  <p:stCondLst>
-                                    <p:cond delay="0"/>
-                                  </p:stCondLst>
-                                  <p:childTnLst>
-                                    <p:set>
-                                      <p:cBhvr>
-                                        <p:cTn id="81" dur="1" fill="hold">
-                                          <p:stCondLst>
-                                            <p:cond delay="0"/>
-                                          </p:stCondLst>
-                                        </p:cTn>
-                                        <p:tgtEl>
-                                          <p:spTgt spid="4">
-                                            <p:txEl>
-                                              <p:pRg st="6" end="6"/>
-                                            </p:txEl>
-                                          </p:spTgt>
-                                        </p:tgtEl>
-                                        <p:attrNameLst>
-                                          <p:attrName>style.visibility</p:attrName>
-                                        </p:attrNameLst>
-                                      </p:cBhvr>
-                                      <p:to>
-                                        <p:strVal val="visible"/>
-                                      </p:to>
-                                    </p:set>
-                                    <p:animEffect transition="in" filter="wipe(left)">
-                                      <p:cBhvr>
-                                        <p:cTn id="82" dur="500"/>
-                                        <p:tgtEl>
-                                          <p:spTgt spid="4">
-                                            <p:txEl>
-                                              <p:pRg st="6" end="6"/>
-                                            </p:txEl>
-                                          </p:spTgt>
-                                        </p:tgtEl>
-                                      </p:cBhvr>
-                                    </p:animEffect>
-                                  </p:childTnLst>
-                                </p:cTn>
-                              </p:par>
-                            </p:childTnLst>
-                          </p:cTn>
-                        </p:par>
-                      </p:childTnLst>
-                    </p:cTn>
-                  </p:par>
-                </p:childTnLst>
-              </p:cTn>
-              <p:prevCondLst>
-                <p:cond evt="onPrev" delay="0">
-                  <p:tgtEl>
-                    <p:sldTgt/>
-                  </p:tgtEl>
-                </p:cond>
-              </p:prevCondLst>
-              <p:nextCondLst>
-                <p:cond evt="onNext" delay="0">
-                  <p:tgtEl>
-                    <p:sldTgt/>
-                  </p:tgtEl>
-                </p:cond>
-              </p:nextCondLst>
-            </p:seq>
-          </p:childTnLst>
-        </p:cTn>
+        <p:cTn id="1" dur="indefinite" restart="never" nodeType="tmRoot"/>
       </p:par>
     </p:tnLst>
   </p:timing>
@@ -19154,573 +19107,10 @@
           <a:chExt cx="0" cy="0"/>
         </a:xfrm>
       </p:grpSpPr>
-      <p:graphicFrame>
-        <p:nvGraphicFramePr>
-          <p:cNvPr id="2" name="Table 1"/>
-          <p:cNvGraphicFramePr>
-            <a:graphicFrameLocks noGrp="1"/>
-          </p:cNvGraphicFramePr>
-          <p:nvPr>
-            <p:extLst>
-              <p:ext uri="{D42A27DB-BD31-4B8C-83A1-F6EECF244321}">
-                <p14:modId xmlns:p14="http://schemas.microsoft.com/office/powerpoint/2010/main" val="1582928256"/>
-              </p:ext>
-            </p:extLst>
-          </p:nvPr>
-        </p:nvGraphicFramePr>
-        <p:xfrm>
-          <a:off x="175134" y="1795409"/>
-          <a:ext cx="11830053" cy="1417320"/>
-        </p:xfrm>
-        <a:graphic>
-          <a:graphicData uri="http://schemas.openxmlformats.org/drawingml/2006/table">
-            <a:tbl>
-              <a:tblPr>
-                <a:tableStyleId>{5FD0F851-EC5A-4D38-B0AD-8093EC10F338}</a:tableStyleId>
-              </a:tblPr>
-              <a:tblGrid>
-                <a:gridCol w="1816991">
-                  <a:extLst>
-                    <a:ext uri="{9D8B030D-6E8A-4147-A177-3AD203B41FA5}">
-                      <a16:colId xmlns:a16="http://schemas.microsoft.com/office/drawing/2014/main" val="2230006388"/>
-                    </a:ext>
-                  </a:extLst>
-                </a:gridCol>
-                <a:gridCol w="10013062">
-                  <a:extLst>
-                    <a:ext uri="{9D8B030D-6E8A-4147-A177-3AD203B41FA5}">
-                      <a16:colId xmlns:a16="http://schemas.microsoft.com/office/drawing/2014/main" val="229815961"/>
-                    </a:ext>
-                  </a:extLst>
-                </a:gridCol>
-              </a:tblGrid>
-              <a:tr h="211375">
-                <a:tc>
-                  <a:txBody>
-                    <a:bodyPr/>
-                    <a:lstStyle/>
-                    <a:p>
-                      <a:pPr algn="l" fontAlgn="b"/>
-                      <a:r>
-                        <a:rPr lang="en-IN" sz="1500" u="none" strike="noStrike" dirty="0">
-                          <a:effectLst/>
-                          <a:latin typeface="Courier New" panose="02070309020205020404" pitchFamily="49" charset="0"/>
-                          <a:cs typeface="Courier New" panose="02070309020205020404" pitchFamily="49" charset="0"/>
-                        </a:rPr>
-                        <a:t>CALCULATE</a:t>
-                      </a:r>
-                      <a:endParaRPr lang="en-IN" sz="1500" b="1" i="0" u="none" strike="noStrike" dirty="0">
-                        <a:solidFill>
-                          <a:srgbClr val="000000"/>
-                        </a:solidFill>
-                        <a:effectLst/>
-                        <a:latin typeface="Courier New" panose="02070309020205020404" pitchFamily="49" charset="0"/>
-                        <a:cs typeface="Courier New" panose="02070309020205020404" pitchFamily="49" charset="0"/>
-                      </a:endParaRPr>
-                    </a:p>
-                  </a:txBody>
-                  <a:tcPr marL="7620" marR="7620" marT="7620" marB="0" anchor="b"/>
-                </a:tc>
-                <a:tc>
-                  <a:txBody>
-                    <a:bodyPr/>
-                    <a:lstStyle/>
-                    <a:p>
-                      <a:pPr algn="l" fontAlgn="b"/>
-                      <a:r>
-                        <a:rPr lang="en-IN" sz="1300" u="none" strike="noStrike" dirty="0" smtClean="0">
-                          <a:effectLst/>
-                          <a:latin typeface="Courier New" panose="02070309020205020404" pitchFamily="49" charset="0"/>
-                          <a:cs typeface="Courier New" panose="02070309020205020404" pitchFamily="49" charset="0"/>
-                        </a:rPr>
-                        <a:t> CALCULATE(SUM(Sales[Amount</a:t>
-                      </a:r>
-                      <a:r>
-                        <a:rPr lang="en-IN" sz="1300" u="none" strike="noStrike" dirty="0">
-                          <a:effectLst/>
-                          <a:latin typeface="Courier New" panose="02070309020205020404" pitchFamily="49" charset="0"/>
-                          <a:cs typeface="Courier New" panose="02070309020205020404" pitchFamily="49" charset="0"/>
-                        </a:rPr>
-                        <a:t>]), Sales[Region] = "West")</a:t>
-                      </a:r>
-                      <a:endParaRPr lang="en-IN" sz="1300" b="0" i="0" u="none" strike="noStrike" dirty="0">
-                        <a:solidFill>
-                          <a:srgbClr val="000000"/>
-                        </a:solidFill>
-                        <a:effectLst/>
-                        <a:latin typeface="Courier New" panose="02070309020205020404" pitchFamily="49" charset="0"/>
-                        <a:cs typeface="Courier New" panose="02070309020205020404" pitchFamily="49" charset="0"/>
-                      </a:endParaRPr>
-                    </a:p>
-                  </a:txBody>
-                  <a:tcPr marL="7620" marR="7620" marT="7620" marB="0" anchor="b"/>
-                </a:tc>
-                <a:extLst>
-                  <a:ext uri="{0D108BD9-81ED-4DB2-BD59-A6C34878D82A}">
-                    <a16:rowId xmlns:a16="http://schemas.microsoft.com/office/drawing/2014/main" val="415163549"/>
-                  </a:ext>
-                </a:extLst>
-              </a:tr>
-              <a:tr h="211375">
-                <a:tc>
-                  <a:txBody>
-                    <a:bodyPr/>
-                    <a:lstStyle/>
-                    <a:p>
-                      <a:pPr algn="l" fontAlgn="b"/>
-                      <a:r>
-                        <a:rPr lang="en-IN" sz="1500" u="none" strike="noStrike" dirty="0">
-                          <a:effectLst/>
-                          <a:latin typeface="Courier New" panose="02070309020205020404" pitchFamily="49" charset="0"/>
-                          <a:cs typeface="Courier New" panose="02070309020205020404" pitchFamily="49" charset="0"/>
-                        </a:rPr>
-                        <a:t>FILTER</a:t>
-                      </a:r>
-                      <a:endParaRPr lang="en-IN" sz="1500" b="1" i="0" u="none" strike="noStrike" dirty="0">
-                        <a:solidFill>
-                          <a:srgbClr val="000000"/>
-                        </a:solidFill>
-                        <a:effectLst/>
-                        <a:latin typeface="Courier New" panose="02070309020205020404" pitchFamily="49" charset="0"/>
-                        <a:cs typeface="Courier New" panose="02070309020205020404" pitchFamily="49" charset="0"/>
-                      </a:endParaRPr>
-                    </a:p>
-                  </a:txBody>
-                  <a:tcPr marL="7620" marR="7620" marT="7620" marB="0" anchor="b"/>
-                </a:tc>
-                <a:tc>
-                  <a:txBody>
-                    <a:bodyPr/>
-                    <a:lstStyle/>
-                    <a:p>
-                      <a:pPr algn="l" fontAlgn="b"/>
-                      <a:r>
-                        <a:rPr lang="en-IN" sz="1300" u="none" strike="noStrike" baseline="0" dirty="0" smtClean="0">
-                          <a:effectLst/>
-                          <a:latin typeface="Courier New" panose="02070309020205020404" pitchFamily="49" charset="0"/>
-                          <a:cs typeface="Courier New" panose="02070309020205020404" pitchFamily="49" charset="0"/>
-                        </a:rPr>
-                        <a:t> </a:t>
-                      </a:r>
-                      <a:r>
-                        <a:rPr lang="en-IN" sz="1300" u="none" strike="noStrike" dirty="0" smtClean="0">
-                          <a:effectLst/>
-                          <a:latin typeface="Courier New" panose="02070309020205020404" pitchFamily="49" charset="0"/>
-                          <a:cs typeface="Courier New" panose="02070309020205020404" pitchFamily="49" charset="0"/>
-                        </a:rPr>
-                        <a:t>FILTER(Sales</a:t>
-                      </a:r>
-                      <a:r>
-                        <a:rPr lang="en-IN" sz="1300" u="none" strike="noStrike" dirty="0">
-                          <a:effectLst/>
-                          <a:latin typeface="Courier New" panose="02070309020205020404" pitchFamily="49" charset="0"/>
-                          <a:cs typeface="Courier New" panose="02070309020205020404" pitchFamily="49" charset="0"/>
-                        </a:rPr>
-                        <a:t>, Sales[Amount] &gt; 1000)</a:t>
-                      </a:r>
-                      <a:endParaRPr lang="en-IN" sz="1300" b="0" i="0" u="none" strike="noStrike" dirty="0">
-                        <a:solidFill>
-                          <a:srgbClr val="000000"/>
-                        </a:solidFill>
-                        <a:effectLst/>
-                        <a:latin typeface="Courier New" panose="02070309020205020404" pitchFamily="49" charset="0"/>
-                        <a:cs typeface="Courier New" panose="02070309020205020404" pitchFamily="49" charset="0"/>
-                      </a:endParaRPr>
-                    </a:p>
-                  </a:txBody>
-                  <a:tcPr marL="7620" marR="7620" marT="7620" marB="0" anchor="b"/>
-                </a:tc>
-                <a:extLst>
-                  <a:ext uri="{0D108BD9-81ED-4DB2-BD59-A6C34878D82A}">
-                    <a16:rowId xmlns:a16="http://schemas.microsoft.com/office/drawing/2014/main" val="3517229111"/>
-                  </a:ext>
-                </a:extLst>
-              </a:tr>
-              <a:tr h="211375">
-                <a:tc>
-                  <a:txBody>
-                    <a:bodyPr/>
-                    <a:lstStyle/>
-                    <a:p>
-                      <a:pPr algn="l" fontAlgn="b"/>
-                      <a:r>
-                        <a:rPr lang="en-IN" sz="1500" u="none" strike="noStrike" dirty="0">
-                          <a:effectLst/>
-                          <a:latin typeface="Courier New" panose="02070309020205020404" pitchFamily="49" charset="0"/>
-                          <a:cs typeface="Courier New" panose="02070309020205020404" pitchFamily="49" charset="0"/>
-                        </a:rPr>
-                        <a:t>ALL</a:t>
-                      </a:r>
-                      <a:endParaRPr lang="en-IN" sz="1500" b="1" i="0" u="none" strike="noStrike" dirty="0">
-                        <a:solidFill>
-                          <a:srgbClr val="000000"/>
-                        </a:solidFill>
-                        <a:effectLst/>
-                        <a:latin typeface="Courier New" panose="02070309020205020404" pitchFamily="49" charset="0"/>
-                        <a:cs typeface="Courier New" panose="02070309020205020404" pitchFamily="49" charset="0"/>
-                      </a:endParaRPr>
-                    </a:p>
-                  </a:txBody>
-                  <a:tcPr marL="7620" marR="7620" marT="7620" marB="0" anchor="b"/>
-                </a:tc>
-                <a:tc>
-                  <a:txBody>
-                    <a:bodyPr/>
-                    <a:lstStyle/>
-                    <a:p>
-                      <a:pPr algn="l" fontAlgn="b"/>
-                      <a:r>
-                        <a:rPr lang="en-IN" sz="1300" u="none" strike="noStrike" baseline="0" dirty="0" smtClean="0">
-                          <a:effectLst/>
-                          <a:latin typeface="Courier New" panose="02070309020205020404" pitchFamily="49" charset="0"/>
-                          <a:cs typeface="Courier New" panose="02070309020205020404" pitchFamily="49" charset="0"/>
-                        </a:rPr>
-                        <a:t> </a:t>
-                      </a:r>
-                      <a:r>
-                        <a:rPr lang="en-IN" sz="1300" u="none" strike="noStrike" dirty="0" smtClean="0">
-                          <a:effectLst/>
-                          <a:latin typeface="Courier New" panose="02070309020205020404" pitchFamily="49" charset="0"/>
-                          <a:cs typeface="Courier New" panose="02070309020205020404" pitchFamily="49" charset="0"/>
-                        </a:rPr>
-                        <a:t>SUM(Sales[Amount</a:t>
-                      </a:r>
-                      <a:r>
-                        <a:rPr lang="en-IN" sz="1300" u="none" strike="noStrike" dirty="0">
-                          <a:effectLst/>
-                          <a:latin typeface="Courier New" panose="02070309020205020404" pitchFamily="49" charset="0"/>
-                          <a:cs typeface="Courier New" panose="02070309020205020404" pitchFamily="49" charset="0"/>
-                        </a:rPr>
-                        <a:t>]) / CALCULATE(SUM(Sales[Amount]), ALL(Sales))</a:t>
-                      </a:r>
-                      <a:endParaRPr lang="en-IN" sz="1300" b="0" i="0" u="none" strike="noStrike" dirty="0">
-                        <a:solidFill>
-                          <a:srgbClr val="000000"/>
-                        </a:solidFill>
-                        <a:effectLst/>
-                        <a:latin typeface="Courier New" panose="02070309020205020404" pitchFamily="49" charset="0"/>
-                        <a:cs typeface="Courier New" panose="02070309020205020404" pitchFamily="49" charset="0"/>
-                      </a:endParaRPr>
-                    </a:p>
-                  </a:txBody>
-                  <a:tcPr marL="7620" marR="7620" marT="7620" marB="0" anchor="b"/>
-                </a:tc>
-                <a:extLst>
-                  <a:ext uri="{0D108BD9-81ED-4DB2-BD59-A6C34878D82A}">
-                    <a16:rowId xmlns:a16="http://schemas.microsoft.com/office/drawing/2014/main" val="302581001"/>
-                  </a:ext>
-                </a:extLst>
-              </a:tr>
-              <a:tr h="211375">
-                <a:tc>
-                  <a:txBody>
-                    <a:bodyPr/>
-                    <a:lstStyle/>
-                    <a:p>
-                      <a:pPr algn="l" fontAlgn="b"/>
-                      <a:r>
-                        <a:rPr lang="en-IN" sz="1500" u="none" strike="noStrike">
-                          <a:effectLst/>
-                          <a:latin typeface="Courier New" panose="02070309020205020404" pitchFamily="49" charset="0"/>
-                          <a:cs typeface="Courier New" panose="02070309020205020404" pitchFamily="49" charset="0"/>
-                        </a:rPr>
-                        <a:t>ALLEXCEPT</a:t>
-                      </a:r>
-                      <a:endParaRPr lang="en-IN" sz="1500" b="1" i="0" u="none" strike="noStrike">
-                        <a:solidFill>
-                          <a:srgbClr val="000000"/>
-                        </a:solidFill>
-                        <a:effectLst/>
-                        <a:latin typeface="Courier New" panose="02070309020205020404" pitchFamily="49" charset="0"/>
-                        <a:cs typeface="Courier New" panose="02070309020205020404" pitchFamily="49" charset="0"/>
-                      </a:endParaRPr>
-                    </a:p>
-                  </a:txBody>
-                  <a:tcPr marL="7620" marR="7620" marT="7620" marB="0" anchor="b"/>
-                </a:tc>
-                <a:tc>
-                  <a:txBody>
-                    <a:bodyPr/>
-                    <a:lstStyle/>
-                    <a:p>
-                      <a:pPr algn="l" fontAlgn="b"/>
-                      <a:r>
-                        <a:rPr lang="en-IN" sz="1300" u="none" strike="noStrike" baseline="0" dirty="0" smtClean="0">
-                          <a:effectLst/>
-                          <a:latin typeface="Courier New" panose="02070309020205020404" pitchFamily="49" charset="0"/>
-                          <a:cs typeface="Courier New" panose="02070309020205020404" pitchFamily="49" charset="0"/>
-                        </a:rPr>
-                        <a:t> </a:t>
-                      </a:r>
-                      <a:r>
-                        <a:rPr lang="en-IN" sz="1300" u="none" strike="noStrike" dirty="0" smtClean="0">
-                          <a:effectLst/>
-                          <a:latin typeface="Courier New" panose="02070309020205020404" pitchFamily="49" charset="0"/>
-                          <a:cs typeface="Courier New" panose="02070309020205020404" pitchFamily="49" charset="0"/>
-                        </a:rPr>
-                        <a:t>CALCULATE(SUM(Sales[Amount</a:t>
-                      </a:r>
-                      <a:r>
-                        <a:rPr lang="en-IN" sz="1300" u="none" strike="noStrike" dirty="0">
-                          <a:effectLst/>
-                          <a:latin typeface="Courier New" panose="02070309020205020404" pitchFamily="49" charset="0"/>
-                          <a:cs typeface="Courier New" panose="02070309020205020404" pitchFamily="49" charset="0"/>
-                        </a:rPr>
-                        <a:t>]), ALLEXCEPT(Geography, Geography[State]))</a:t>
-                      </a:r>
-                      <a:endParaRPr lang="en-IN" sz="1300" b="0" i="0" u="none" strike="noStrike" dirty="0">
-                        <a:solidFill>
-                          <a:srgbClr val="000000"/>
-                        </a:solidFill>
-                        <a:effectLst/>
-                        <a:latin typeface="Courier New" panose="02070309020205020404" pitchFamily="49" charset="0"/>
-                        <a:cs typeface="Courier New" panose="02070309020205020404" pitchFamily="49" charset="0"/>
-                      </a:endParaRPr>
-                    </a:p>
-                  </a:txBody>
-                  <a:tcPr marL="7620" marR="7620" marT="7620" marB="0" anchor="b"/>
-                </a:tc>
-                <a:extLst>
-                  <a:ext uri="{0D108BD9-81ED-4DB2-BD59-A6C34878D82A}">
-                    <a16:rowId xmlns:a16="http://schemas.microsoft.com/office/drawing/2014/main" val="1468910001"/>
-                  </a:ext>
-                </a:extLst>
-              </a:tr>
-              <a:tr h="211375">
-                <a:tc>
-                  <a:txBody>
-                    <a:bodyPr/>
-                    <a:lstStyle/>
-                    <a:p>
-                      <a:pPr algn="l" fontAlgn="b"/>
-                      <a:r>
-                        <a:rPr lang="en-IN" sz="1500" u="none" strike="noStrike">
-                          <a:effectLst/>
-                          <a:latin typeface="Courier New" panose="02070309020205020404" pitchFamily="49" charset="0"/>
-                          <a:cs typeface="Courier New" panose="02070309020205020404" pitchFamily="49" charset="0"/>
-                        </a:rPr>
-                        <a:t>ALLSELECTED</a:t>
-                      </a:r>
-                      <a:endParaRPr lang="en-IN" sz="1500" b="1" i="0" u="none" strike="noStrike">
-                        <a:solidFill>
-                          <a:srgbClr val="000000"/>
-                        </a:solidFill>
-                        <a:effectLst/>
-                        <a:latin typeface="Courier New" panose="02070309020205020404" pitchFamily="49" charset="0"/>
-                        <a:cs typeface="Courier New" panose="02070309020205020404" pitchFamily="49" charset="0"/>
-                      </a:endParaRPr>
-                    </a:p>
-                  </a:txBody>
-                  <a:tcPr marL="7620" marR="7620" marT="7620" marB="0" anchor="b"/>
-                </a:tc>
-                <a:tc>
-                  <a:txBody>
-                    <a:bodyPr/>
-                    <a:lstStyle/>
-                    <a:p>
-                      <a:pPr algn="l" fontAlgn="b"/>
-                      <a:r>
-                        <a:rPr lang="en-IN" sz="1300" u="none" strike="noStrike" baseline="0" dirty="0" smtClean="0">
-                          <a:effectLst/>
-                          <a:latin typeface="Courier New" panose="02070309020205020404" pitchFamily="49" charset="0"/>
-                          <a:cs typeface="Courier New" panose="02070309020205020404" pitchFamily="49" charset="0"/>
-                        </a:rPr>
-                        <a:t> </a:t>
-                      </a:r>
-                      <a:r>
-                        <a:rPr lang="en-IN" sz="1300" u="none" strike="noStrike" dirty="0" smtClean="0">
-                          <a:effectLst/>
-                          <a:latin typeface="Courier New" panose="02070309020205020404" pitchFamily="49" charset="0"/>
-                          <a:cs typeface="Courier New" panose="02070309020205020404" pitchFamily="49" charset="0"/>
-                        </a:rPr>
-                        <a:t>CALCULATE(SUM(Sales[Amount</a:t>
-                      </a:r>
-                      <a:r>
-                        <a:rPr lang="en-IN" sz="1300" u="none" strike="noStrike" dirty="0">
-                          <a:effectLst/>
-                          <a:latin typeface="Courier New" panose="02070309020205020404" pitchFamily="49" charset="0"/>
-                          <a:cs typeface="Courier New" panose="02070309020205020404" pitchFamily="49" charset="0"/>
-                        </a:rPr>
-                        <a:t>]), ALLSELECTED(Sales))</a:t>
-                      </a:r>
-                      <a:endParaRPr lang="en-IN" sz="1300" b="0" i="0" u="none" strike="noStrike" dirty="0">
-                        <a:solidFill>
-                          <a:srgbClr val="000000"/>
-                        </a:solidFill>
-                        <a:effectLst/>
-                        <a:latin typeface="Courier New" panose="02070309020205020404" pitchFamily="49" charset="0"/>
-                        <a:cs typeface="Courier New" panose="02070309020205020404" pitchFamily="49" charset="0"/>
-                      </a:endParaRPr>
-                    </a:p>
-                  </a:txBody>
-                  <a:tcPr marL="7620" marR="7620" marT="7620" marB="0" anchor="b"/>
-                </a:tc>
-                <a:extLst>
-                  <a:ext uri="{0D108BD9-81ED-4DB2-BD59-A6C34878D82A}">
-                    <a16:rowId xmlns:a16="http://schemas.microsoft.com/office/drawing/2014/main" val="3826821517"/>
-                  </a:ext>
-                </a:extLst>
-              </a:tr>
-              <a:tr h="211375">
-                <a:tc>
-                  <a:txBody>
-                    <a:bodyPr/>
-                    <a:lstStyle/>
-                    <a:p>
-                      <a:pPr algn="l" fontAlgn="b"/>
-                      <a:r>
-                        <a:rPr lang="en-IN" sz="1500" u="none" strike="noStrike">
-                          <a:effectLst/>
-                          <a:latin typeface="Courier New" panose="02070309020205020404" pitchFamily="49" charset="0"/>
-                          <a:cs typeface="Courier New" panose="02070309020205020404" pitchFamily="49" charset="0"/>
-                        </a:rPr>
-                        <a:t>RELATED</a:t>
-                      </a:r>
-                      <a:endParaRPr lang="en-IN" sz="1500" b="1" i="0" u="none" strike="noStrike">
-                        <a:solidFill>
-                          <a:srgbClr val="000000"/>
-                        </a:solidFill>
-                        <a:effectLst/>
-                        <a:latin typeface="Courier New" panose="02070309020205020404" pitchFamily="49" charset="0"/>
-                        <a:cs typeface="Courier New" panose="02070309020205020404" pitchFamily="49" charset="0"/>
-                      </a:endParaRPr>
-                    </a:p>
-                  </a:txBody>
-                  <a:tcPr marL="7620" marR="7620" marT="7620" marB="0" anchor="b"/>
-                </a:tc>
-                <a:tc>
-                  <a:txBody>
-                    <a:bodyPr/>
-                    <a:lstStyle/>
-                    <a:p>
-                      <a:pPr algn="l" fontAlgn="b"/>
-                      <a:r>
-                        <a:rPr lang="en-IN" sz="1300" u="none" strike="noStrike" baseline="0" dirty="0" smtClean="0">
-                          <a:effectLst/>
-                          <a:latin typeface="Courier New" panose="02070309020205020404" pitchFamily="49" charset="0"/>
-                          <a:cs typeface="Courier New" panose="02070309020205020404" pitchFamily="49" charset="0"/>
-                        </a:rPr>
-                        <a:t> </a:t>
-                      </a:r>
-                      <a:r>
-                        <a:rPr lang="en-IN" sz="1300" u="none" strike="noStrike" dirty="0" smtClean="0">
-                          <a:effectLst/>
-                          <a:latin typeface="Courier New" panose="02070309020205020404" pitchFamily="49" charset="0"/>
-                          <a:cs typeface="Courier New" panose="02070309020205020404" pitchFamily="49" charset="0"/>
-                        </a:rPr>
-                        <a:t>RELATED(Product[Price</a:t>
-                      </a:r>
-                      <a:r>
-                        <a:rPr lang="en-IN" sz="1300" u="none" strike="noStrike" dirty="0">
-                          <a:effectLst/>
-                          <a:latin typeface="Courier New" panose="02070309020205020404" pitchFamily="49" charset="0"/>
-                          <a:cs typeface="Courier New" panose="02070309020205020404" pitchFamily="49" charset="0"/>
-                        </a:rPr>
-                        <a:t>])</a:t>
-                      </a:r>
-                      <a:endParaRPr lang="en-IN" sz="1300" b="0" i="0" u="none" strike="noStrike" dirty="0">
-                        <a:solidFill>
-                          <a:srgbClr val="000000"/>
-                        </a:solidFill>
-                        <a:effectLst/>
-                        <a:latin typeface="Courier New" panose="02070309020205020404" pitchFamily="49" charset="0"/>
-                        <a:cs typeface="Courier New" panose="02070309020205020404" pitchFamily="49" charset="0"/>
-                      </a:endParaRPr>
-                    </a:p>
-                  </a:txBody>
-                  <a:tcPr marL="7620" marR="7620" marT="7620" marB="0" anchor="b"/>
-                </a:tc>
-                <a:extLst>
-                  <a:ext uri="{0D108BD9-81ED-4DB2-BD59-A6C34878D82A}">
-                    <a16:rowId xmlns:a16="http://schemas.microsoft.com/office/drawing/2014/main" val="2843789993"/>
-                  </a:ext>
-                </a:extLst>
-              </a:tr>
-            </a:tbl>
-          </a:graphicData>
-        </a:graphic>
-      </p:graphicFrame>
-      <p:sp>
-        <p:nvSpPr>
-          <p:cNvPr id="3" name="Rectangle 2"/>
-          <p:cNvSpPr/>
-          <p:nvPr/>
-        </p:nvSpPr>
-        <p:spPr>
-          <a:xfrm>
-            <a:off x="344129" y="411796"/>
-            <a:ext cx="6096000" cy="646331"/>
-          </a:xfrm>
-          <a:prstGeom prst="rect">
-            <a:avLst/>
-          </a:prstGeom>
-        </p:spPr>
-        <p:txBody>
-          <a:bodyPr>
-            <a:spAutoFit/>
-          </a:bodyPr>
-          <a:lstStyle/>
-          <a:p>
-            <a:pPr lvl="0" eaLnBrk="0" fontAlgn="base" hangingPunct="0">
-              <a:spcBef>
-                <a:spcPct val="0"/>
-              </a:spcBef>
-              <a:spcAft>
-                <a:spcPct val="0"/>
-              </a:spcAft>
-            </a:pPr>
-            <a:r>
-              <a:rPr lang="en-US" altLang="en-US" b="1" dirty="0">
-                <a:solidFill>
-                  <a:schemeClr val="accent1">
-                    <a:lumMod val="60000"/>
-                    <a:lumOff val="40000"/>
-                  </a:schemeClr>
-                </a:solidFill>
-                <a:latin typeface="Candara" panose="020E0502030303020204" pitchFamily="34" charset="0"/>
-              </a:rPr>
-              <a:t>Filter functions</a:t>
-            </a:r>
-            <a:endParaRPr lang="en-US" altLang="en-US" dirty="0">
-              <a:solidFill>
-                <a:schemeClr val="accent1">
-                  <a:lumMod val="60000"/>
-                  <a:lumOff val="40000"/>
-                </a:schemeClr>
-              </a:solidFill>
-              <a:latin typeface="Candara" panose="020E0502030303020204" pitchFamily="34" charset="0"/>
-            </a:endParaRPr>
-          </a:p>
-          <a:p>
-            <a:pPr lvl="1" eaLnBrk="0" fontAlgn="base" hangingPunct="0">
-              <a:spcBef>
-                <a:spcPct val="0"/>
-              </a:spcBef>
-              <a:spcAft>
-                <a:spcPct val="0"/>
-              </a:spcAft>
-              <a:buFontTx/>
-              <a:buChar char="•"/>
-            </a:pPr>
-            <a:r>
-              <a:rPr lang="en-US" altLang="en-US" dirty="0">
-                <a:solidFill>
-                  <a:schemeClr val="accent1">
-                    <a:lumMod val="60000"/>
-                    <a:lumOff val="40000"/>
-                  </a:schemeClr>
-                </a:solidFill>
-                <a:latin typeface="Candara" panose="020E0502030303020204" pitchFamily="34" charset="0"/>
-              </a:rPr>
-              <a:t>Filter functions manipulate table and filter contexts.</a:t>
-            </a:r>
-          </a:p>
-        </p:txBody>
-      </p:sp>
     </p:spTree>
     <p:extLst>
       <p:ext uri="{BB962C8B-B14F-4D97-AF65-F5344CB8AC3E}">
-        <p14:creationId xmlns:p14="http://schemas.microsoft.com/office/powerpoint/2010/main" val="2206240905"/>
+        <p14:creationId xmlns:p14="http://schemas.microsoft.com/office/powerpoint/2010/main" val="99022546"/>
       </p:ext>
     </p:extLst>
   </p:cSld>
@@ -19757,7 +19147,7 @@
     </p:spTree>
     <p:extLst>
       <p:ext uri="{BB962C8B-B14F-4D97-AF65-F5344CB8AC3E}">
-        <p14:creationId xmlns:p14="http://schemas.microsoft.com/office/powerpoint/2010/main" val="99022546"/>
+        <p14:creationId xmlns:p14="http://schemas.microsoft.com/office/powerpoint/2010/main" val="4042112978"/>
       </p:ext>
     </p:extLst>
   </p:cSld>
@@ -19775,43 +19165,6 @@
 </file>
 
 <file path=ppt/slides/slide32.xml><?xml version="1.0" encoding="utf-8"?>
-<p:sld xmlns:a="http://schemas.openxmlformats.org/drawingml/2006/main" xmlns:r="http://schemas.openxmlformats.org/officeDocument/2006/relationships" xmlns:p="http://schemas.openxmlformats.org/presentationml/2006/main">
-  <p:cSld>
-    <p:spTree>
-      <p:nvGrpSpPr>
-        <p:cNvPr id="1" name=""/>
-        <p:cNvGrpSpPr/>
-        <p:nvPr/>
-      </p:nvGrpSpPr>
-      <p:grpSpPr>
-        <a:xfrm>
-          <a:off x="0" y="0"/>
-          <a:ext cx="0" cy="0"/>
-          <a:chOff x="0" y="0"/>
-          <a:chExt cx="0" cy="0"/>
-        </a:xfrm>
-      </p:grpSpPr>
-    </p:spTree>
-    <p:extLst>
-      <p:ext uri="{BB962C8B-B14F-4D97-AF65-F5344CB8AC3E}">
-        <p14:creationId xmlns:p14="http://schemas.microsoft.com/office/powerpoint/2010/main" val="4042112978"/>
-      </p:ext>
-    </p:extLst>
-  </p:cSld>
-  <p:clrMapOvr>
-    <a:masterClrMapping/>
-  </p:clrMapOvr>
-  <p:timing>
-    <p:tnLst>
-      <p:par>
-        <p:cTn id="1" dur="indefinite" restart="never" nodeType="tmRoot"/>
-      </p:par>
-    </p:tnLst>
-  </p:timing>
-</p:sld>
-</file>
-
-<file path=ppt/slides/slide33.xml><?xml version="1.0" encoding="utf-8"?>
 <p:sld xmlns:a="http://schemas.openxmlformats.org/drawingml/2006/main" xmlns:r="http://schemas.openxmlformats.org/officeDocument/2006/relationships" xmlns:p="http://schemas.openxmlformats.org/presentationml/2006/main">
   <p:cSld>
     <p:spTree>
